--- a/lessons/lesson-12/slides.pptx
+++ b/lessons/lesson-12/slides.pptx
@@ -2,32 +2,33 @@
 <file path=ppt/presentation.xml><?xml version="1.0" encoding="utf-8"?>
 <p:presentation xmlns:p="http://schemas.openxmlformats.org/presentationml/2006/main">
   <p:sldMasterIdLst>
-    <p:sldMasterId xmlns:r="http://schemas.openxmlformats.org/officeDocument/2006/relationships" id="2147483648" r:id="R3f09cb419b564b12"/>
+    <p:sldMasterId xmlns:r="http://schemas.openxmlformats.org/officeDocument/2006/relationships" id="2147483648" r:id="Re130ae3a826e4ff0"/>
   </p:sldMasterIdLst>
   <p:notesMasterIdLst>
-    <p:notesMasterId xmlns:r="http://schemas.openxmlformats.org/officeDocument/2006/relationships" r:id="R17998035d1324b17"/>
+    <p:notesMasterId xmlns:r="http://schemas.openxmlformats.org/officeDocument/2006/relationships" r:id="Rd271b259f00c4a37"/>
   </p:notesMasterIdLst>
   <p:sldIdLst>
-    <p:sldId xmlns:r="http://schemas.openxmlformats.org/officeDocument/2006/relationships" id="256" r:id="R5f05ea6bbca642bf"/>
-    <p:sldId xmlns:r="http://schemas.openxmlformats.org/officeDocument/2006/relationships" id="257" r:id="R25bee86cf2bc4702"/>
-    <p:sldId xmlns:r="http://schemas.openxmlformats.org/officeDocument/2006/relationships" id="258" r:id="R485e6a62aa6c48b1"/>
-    <p:sldId xmlns:r="http://schemas.openxmlformats.org/officeDocument/2006/relationships" id="259" r:id="R6bef3cc1459b48da"/>
-    <p:sldId xmlns:r="http://schemas.openxmlformats.org/officeDocument/2006/relationships" id="260" r:id="R587fe72fb0f7413f"/>
-    <p:sldId xmlns:r="http://schemas.openxmlformats.org/officeDocument/2006/relationships" id="261" r:id="Rff518ab9d52b45e5"/>
-    <p:sldId xmlns:r="http://schemas.openxmlformats.org/officeDocument/2006/relationships" id="262" r:id="Rf9731f3637844bda"/>
-    <p:sldId xmlns:r="http://schemas.openxmlformats.org/officeDocument/2006/relationships" id="263" r:id="Ra63385f680ff478d"/>
-    <p:sldId xmlns:r="http://schemas.openxmlformats.org/officeDocument/2006/relationships" id="264" r:id="R3b9d12f02bbd40bc"/>
-    <p:sldId xmlns:r="http://schemas.openxmlformats.org/officeDocument/2006/relationships" id="265" r:id="Rff8a294a1b58491e"/>
-    <p:sldId xmlns:r="http://schemas.openxmlformats.org/officeDocument/2006/relationships" id="266" r:id="Rc447fb5ea4c14bbd"/>
-    <p:sldId xmlns:r="http://schemas.openxmlformats.org/officeDocument/2006/relationships" id="267" r:id="R169b116762664db0"/>
-    <p:sldId xmlns:r="http://schemas.openxmlformats.org/officeDocument/2006/relationships" id="268" r:id="R363b31f5e7a047ff"/>
-    <p:sldId xmlns:r="http://schemas.openxmlformats.org/officeDocument/2006/relationships" id="269" r:id="Rfb7b395c2af04f23"/>
-    <p:sldId xmlns:r="http://schemas.openxmlformats.org/officeDocument/2006/relationships" id="270" r:id="Rdc7da61b42344e3a"/>
-    <p:sldId xmlns:r="http://schemas.openxmlformats.org/officeDocument/2006/relationships" id="271" r:id="R8d9b7468ed6348e4"/>
-    <p:sldId xmlns:r="http://schemas.openxmlformats.org/officeDocument/2006/relationships" id="272" r:id="Rc5428fb119294a6a"/>
-    <p:sldId xmlns:r="http://schemas.openxmlformats.org/officeDocument/2006/relationships" id="273" r:id="R316af3e6f0174300"/>
-    <p:sldId xmlns:r="http://schemas.openxmlformats.org/officeDocument/2006/relationships" id="274" r:id="R1f55c62f2dfc495e"/>
-    <p:sldId xmlns:r="http://schemas.openxmlformats.org/officeDocument/2006/relationships" id="275" r:id="Rd683d3b356804968"/>
+    <p:sldId xmlns:r="http://schemas.openxmlformats.org/officeDocument/2006/relationships" id="256" r:id="R0f8abdd66df444d4"/>
+    <p:sldId xmlns:r="http://schemas.openxmlformats.org/officeDocument/2006/relationships" id="257" r:id="Rf838e41c861d498d"/>
+    <p:sldId xmlns:r="http://schemas.openxmlformats.org/officeDocument/2006/relationships" id="258" r:id="R0843360ac8344548"/>
+    <p:sldId xmlns:r="http://schemas.openxmlformats.org/officeDocument/2006/relationships" id="259" r:id="Rb945eaf377ec4692"/>
+    <p:sldId xmlns:r="http://schemas.openxmlformats.org/officeDocument/2006/relationships" id="260" r:id="Ra2c395e300c14f46"/>
+    <p:sldId xmlns:r="http://schemas.openxmlformats.org/officeDocument/2006/relationships" id="261" r:id="Rdf2bf88924e942d8"/>
+    <p:sldId xmlns:r="http://schemas.openxmlformats.org/officeDocument/2006/relationships" id="262" r:id="Rdbadaad387f44257"/>
+    <p:sldId xmlns:r="http://schemas.openxmlformats.org/officeDocument/2006/relationships" id="263" r:id="R69b0ba8565774ce8"/>
+    <p:sldId xmlns:r="http://schemas.openxmlformats.org/officeDocument/2006/relationships" id="264" r:id="R6de1089beb904cfd"/>
+    <p:sldId xmlns:r="http://schemas.openxmlformats.org/officeDocument/2006/relationships" id="265" r:id="R04a182604c4b4a3b"/>
+    <p:sldId xmlns:r="http://schemas.openxmlformats.org/officeDocument/2006/relationships" id="266" r:id="Rda0cb110a8934ac9"/>
+    <p:sldId xmlns:r="http://schemas.openxmlformats.org/officeDocument/2006/relationships" id="267" r:id="R5c1fa6e34e3845b3"/>
+    <p:sldId xmlns:r="http://schemas.openxmlformats.org/officeDocument/2006/relationships" id="268" r:id="R6b5a63607ae94b6f"/>
+    <p:sldId xmlns:r="http://schemas.openxmlformats.org/officeDocument/2006/relationships" id="269" r:id="Rc37fb5e2e30f4d81"/>
+    <p:sldId xmlns:r="http://schemas.openxmlformats.org/officeDocument/2006/relationships" id="270" r:id="Re4ed686891364878"/>
+    <p:sldId xmlns:r="http://schemas.openxmlformats.org/officeDocument/2006/relationships" id="271" r:id="Rec3db35ec2e942e7"/>
+    <p:sldId xmlns:r="http://schemas.openxmlformats.org/officeDocument/2006/relationships" id="272" r:id="R2c6176b641164faf"/>
+    <p:sldId xmlns:r="http://schemas.openxmlformats.org/officeDocument/2006/relationships" id="273" r:id="R286543dfd91b4e94"/>
+    <p:sldId xmlns:r="http://schemas.openxmlformats.org/officeDocument/2006/relationships" id="274" r:id="R698c2e272acf4a87"/>
+    <p:sldId xmlns:r="http://schemas.openxmlformats.org/officeDocument/2006/relationships" id="275" r:id="R51e422d093064ecd"/>
+    <p:sldId xmlns:r="http://schemas.openxmlformats.org/officeDocument/2006/relationships" id="276" r:id="R00610fd0847243f0"/>
   </p:sldIdLst>
   <p:sldSz cx="12192000" cy="6858000"/>
   <p:notesSz cx="6858000" cy="9144000"/>
@@ -407,7 +408,7 @@
           <a:lstStyle xmlns:a="http://schemas.openxmlformats.org/drawingml/2006/main"/>
           <a:p xmlns:a="http://schemas.openxmlformats.org/drawingml/2006/main">
             <a:r>
-              <a:t>第 11 课只完成受限循环。本课追问：循环之外，谁决定输入、权限、评价、失败和写回？</a:t>
+              <a:t>本讲聚焦“Agent/Skill 逻辑与自主 Research Workflow 设计”。封面只保留正式课名，课堂问题从下一页展开。</a:t>
             </a:r>
           </a:p>
           <a:p xmlns:a="http://schemas.openxmlformats.org/drawingml/2006/main">
@@ -422,17 +423,12 @@
           </a:p>
           <a:p xmlns:a="http://schemas.openxmlformats.org/drawingml/2006/main">
             <a:r>
-              <a:t>- /Users/bright/Projects/courses/graduate/lessons/lesson-11/handout.md</a:t>
-            </a:r>
-          </a:p>
-          <a:p xmlns:a="http://schemas.openxmlformats.org/drawingml/2006/main">
-            <a:r>
-              <a:t>- /Users/bright/Projects/courses/graduate/lessons/lesson-12/handout.md</a:t>
-            </a:r>
-          </a:p>
-          <a:p xmlns:a="http://schemas.openxmlformats.org/drawingml/2006/main">
-            <a:r>
-              <a:t>- /Users/bright/Projects/courses/graduate/lessons/备课规划.md</a:t>
+              <a:t>- /Users/bright/Projects/courses/graduate/course/syllabus.md</a:t>
+            </a:r>
+          </a:p>
+          <a:p xmlns:a="http://schemas.openxmlformats.org/drawingml/2006/main">
+            <a:r>
+              <a:t>- /Users/bright/Projects/courses/graduate/lessons/lesson-12/slides.md</a:t>
             </a:r>
           </a:p>
           <a:p xmlns:a="http://schemas.openxmlformats.org/drawingml/2006/main">
@@ -1513,6 +1509,106 @@
 </file>
 
 <file path=ppt/notesSlides/notesSlide20.xml><?xml version="1.0" encoding="utf-8"?>
+<p:notes xmlns:p="http://schemas.openxmlformats.org/presentationml/2006/main">
+  <p:cSld>
+    <p:spTree>
+      <p:nvGrpSpPr>
+        <p:cNvPr id="1" name=""/>
+        <p:cNvGrpSpPr/>
+        <p:nvPr/>
+      </p:nvGrpSpPr>
+      <p:grpSpPr>
+        <a:xfrm xmlns:a="http://schemas.openxmlformats.org/drawingml/2006/main"/>
+      </p:grpSpPr>
+      <p:sp>
+        <p:nvSpPr>
+          <p:cNvPr id="2" name="Slide Image Placeholder 1"/>
+          <p:cNvSpPr>
+            <a:spLocks xmlns:a="http://schemas.openxmlformats.org/drawingml/2006/main" noGrp="1"/>
+          </p:cNvSpPr>
+          <p:nvPr>
+            <p:ph type="sldImg" idx="0"/>
+          </p:nvPr>
+        </p:nvSpPr>
+        <p:spPr/>
+      </p:sp>
+      <p:sp>
+        <p:nvSpPr>
+          <p:cNvPr id="3" name="Notes Placeholder 2"/>
+          <p:cNvSpPr>
+            <a:spLocks xmlns:a="http://schemas.openxmlformats.org/drawingml/2006/main" noGrp="1"/>
+          </p:cNvSpPr>
+          <p:nvPr>
+            <p:ph type="body" idx="1"/>
+          </p:nvPr>
+        </p:nvSpPr>
+        <p:spPr/>
+        <p:txBody>
+          <a:bodyPr xmlns:a="http://schemas.openxmlformats.org/drawingml/2006/main"/>
+          <a:lstStyle xmlns:a="http://schemas.openxmlformats.org/drawingml/2006/main"/>
+          <a:p xmlns:a="http://schemas.openxmlformats.org/drawingml/2006/main">
+            <a:r>
+              <a:t>回收本讲核心概念及其关系。本页不新增任务；请学生用边界句检查自己的项目工件。</a:t>
+            </a:r>
+          </a:p>
+          <a:p xmlns:a="http://schemas.openxmlformats.org/drawingml/2006/main">
+            <a:r>
+              <a:t/>
+            </a:r>
+          </a:p>
+          <a:p xmlns:a="http://schemas.openxmlformats.org/drawingml/2006/main">
+            <a:r>
+              <a:t>[Sources]</a:t>
+            </a:r>
+          </a:p>
+          <a:p xmlns:a="http://schemas.openxmlformats.org/drawingml/2006/main">
+            <a:r>
+              <a:t>- /Users/bright/Projects/courses/graduate/course/syllabus.md</a:t>
+            </a:r>
+          </a:p>
+          <a:p xmlns:a="http://schemas.openxmlformats.org/drawingml/2006/main">
+            <a:r>
+              <a:t>- /Users/bright/Projects/courses/graduate/lessons/lesson-12/handout.md</a:t>
+            </a:r>
+          </a:p>
+          <a:p xmlns:a="http://schemas.openxmlformats.org/drawingml/2006/main">
+            <a:r>
+              <a:t>- /Users/bright/Projects/courses/graduate/lessons/lesson-12/slides.md</a:t>
+            </a:r>
+          </a:p>
+          <a:p xmlns:a="http://schemas.openxmlformats.org/drawingml/2006/main">
+            <a:r>
+              <a:t>[/Sources]</a:t>
+            </a:r>
+          </a:p>
+        </p:txBody>
+      </p:sp>
+      <p:sp>
+        <p:nvSpPr>
+          <p:cNvPr id="4" name="Slide Number Placeholder 3"/>
+          <p:cNvSpPr>
+            <a:spLocks xmlns:a="http://schemas.openxmlformats.org/drawingml/2006/main" noGrp="1"/>
+          </p:cNvSpPr>
+          <p:nvPr>
+            <p:ph type="sldNum" idx="5"/>
+          </p:nvPr>
+        </p:nvSpPr>
+        <p:spPr/>
+        <p:txBody>
+          <a:bodyPr xmlns:a="http://schemas.openxmlformats.org/drawingml/2006/main"/>
+          <a:lstStyle xmlns:a="http://schemas.openxmlformats.org/drawingml/2006/main"/>
+          <a:p xmlns:a="http://schemas.openxmlformats.org/drawingml/2006/main"/>
+        </p:txBody>
+      </p:sp>
+    </p:spTree>
+  </p:cSld>
+  <p:clrMapOvr>
+    <a:masterClrMapping xmlns:a="http://schemas.openxmlformats.org/drawingml/2006/main"/>
+  </p:clrMapOvr>
+</p:notes>
+</file>
+
+<file path=ppt/notesSlides/notesSlide21.xml><?xml version="1.0" encoding="utf-8"?>
 <p:notes xmlns:p="http://schemas.openxmlformats.org/presentationml/2006/main">
   <p:cSld>
     <p:spTree>
@@ -2298,7 +2394,7 @@
           <p:nvPr/>
         </p:nvPicPr>
         <p:blipFill>
-          <a:blip xmlns:r="http://schemas.openxmlformats.org/officeDocument/2006/relationships" xmlns:a="http://schemas.openxmlformats.org/drawingml/2006/main" r:embed="Rb5c18a14eebe414c">
+          <a:blip xmlns:r="http://schemas.openxmlformats.org/officeDocument/2006/relationships" xmlns:a="http://schemas.openxmlformats.org/drawingml/2006/main" r:embed="R4ff37e4183cb4ac9">
             <a:duotone>
               <a:prstClr val="black"/>
               <a:schemeClr val="accent1">
@@ -2476,7 +2572,7 @@
           <p:nvPr/>
         </p:nvPicPr>
         <p:blipFill rotWithShape="1">
-          <a:blip xmlns:r="http://schemas.openxmlformats.org/officeDocument/2006/relationships" xmlns:a="http://schemas.openxmlformats.org/drawingml/2006/main" r:embed="R0e0ecf7457a2436c"/>
+          <a:blip xmlns:r="http://schemas.openxmlformats.org/officeDocument/2006/relationships" xmlns:a="http://schemas.openxmlformats.org/drawingml/2006/main" r:embed="Rfc916de2132947f9"/>
           <a:srcRect xmlns:a="http://schemas.openxmlformats.org/drawingml/2006/main" l="74359" t="0" r="1346" b="0"/>
           <a:stretch xmlns:a="http://schemas.openxmlformats.org/drawingml/2006/main"/>
         </p:blipFill>
@@ -2499,7 +2595,7 @@
           <p:nvPr/>
         </p:nvPicPr>
         <p:blipFill rotWithShape="1">
-          <a:blip xmlns:r="http://schemas.openxmlformats.org/officeDocument/2006/relationships" xmlns:a="http://schemas.openxmlformats.org/drawingml/2006/main" r:embed="R36dee6805f824452">
+          <a:blip xmlns:r="http://schemas.openxmlformats.org/officeDocument/2006/relationships" xmlns:a="http://schemas.openxmlformats.org/drawingml/2006/main" r:embed="Re7b7705594904aa4">
             <a:alphaModFix amt="35000"/>
           </a:blip>
           <a:srcRect xmlns:a="http://schemas.openxmlformats.org/drawingml/2006/main" l="0" t="9831" r="0" b="36385"/>
@@ -2761,7 +2857,7 @@
           <p:nvPr/>
         </p:nvPicPr>
         <p:blipFill>
-          <a:blip xmlns:r="http://schemas.openxmlformats.org/officeDocument/2006/relationships" xmlns:a="http://schemas.openxmlformats.org/drawingml/2006/main" r:embed="R7c2a548362a84259"/>
+          <a:blip xmlns:r="http://schemas.openxmlformats.org/officeDocument/2006/relationships" xmlns:a="http://schemas.openxmlformats.org/drawingml/2006/main" r:embed="R219c46c75df54c8e"/>
           <a:srcRect xmlns:a="http://schemas.openxmlformats.org/drawingml/2006/main" l="0" t="0" r="54251" b="0"/>
           <a:stretch xmlns:a="http://schemas.openxmlformats.org/drawingml/2006/main"/>
         </p:blipFill>
@@ -3018,7 +3114,7 @@
           <p:nvPr/>
         </p:nvPicPr>
         <p:blipFill rotWithShape="1">
-          <a:blip xmlns:r="http://schemas.openxmlformats.org/officeDocument/2006/relationships" xmlns:a="http://schemas.openxmlformats.org/drawingml/2006/main" r:embed="R8fc9232fbe564aa2"/>
+          <a:blip xmlns:r="http://schemas.openxmlformats.org/officeDocument/2006/relationships" xmlns:a="http://schemas.openxmlformats.org/drawingml/2006/main" r:embed="R05116a2e43c5456f"/>
           <a:srcRect xmlns:a="http://schemas.openxmlformats.org/drawingml/2006/main" l="0" t="0" r="1346" b="0"/>
           <a:stretch xmlns:a="http://schemas.openxmlformats.org/drawingml/2006/main"/>
         </p:blipFill>
@@ -3201,7 +3297,7 @@
           <p:nvPr/>
         </p:nvPicPr>
         <p:blipFill>
-          <a:blip xmlns:r="http://schemas.openxmlformats.org/officeDocument/2006/relationships" xmlns:a="http://schemas.openxmlformats.org/drawingml/2006/main" r:embed="R1cd4686f84ca406a"/>
+          <a:blip xmlns:r="http://schemas.openxmlformats.org/officeDocument/2006/relationships" xmlns:a="http://schemas.openxmlformats.org/drawingml/2006/main" r:embed="Rb2b5c35515194de6"/>
           <a:stretch xmlns:a="http://schemas.openxmlformats.org/drawingml/2006/main">
             <a:fillRect l="0" t="0" r="0" b="0"/>
           </a:stretch>
@@ -3297,7 +3393,7 @@
           <p:nvPr/>
         </p:nvPicPr>
         <p:blipFill>
-          <a:blip xmlns:r="http://schemas.openxmlformats.org/officeDocument/2006/relationships" xmlns:a="http://schemas.openxmlformats.org/drawingml/2006/main" r:embed="R43cbdd48efc941cb">
+          <a:blip xmlns:r="http://schemas.openxmlformats.org/officeDocument/2006/relationships" xmlns:a="http://schemas.openxmlformats.org/drawingml/2006/main" r:embed="Rf603ff206965453d">
             <a:duotone>
               <a:prstClr val="black"/>
               <a:schemeClr val="accent1">
@@ -3464,7 +3560,7 @@
           <p:nvPr/>
         </p:nvPicPr>
         <p:blipFill rotWithShape="1">
-          <a:blip xmlns:r="http://schemas.openxmlformats.org/officeDocument/2006/relationships" xmlns:a="http://schemas.openxmlformats.org/drawingml/2006/main" r:embed="R225abf307bcd45ea">
+          <a:blip xmlns:r="http://schemas.openxmlformats.org/officeDocument/2006/relationships" xmlns:a="http://schemas.openxmlformats.org/drawingml/2006/main" r:embed="R4e984d76341c4f99">
             <a:alphaModFix amt="20000"/>
             <a:duotone>
               <a:schemeClr val="accent4">
@@ -3562,10 +3658,10 @@
   </p:cSld>
   <p:clrMap bg1="lt1" tx1="dk1" bg2="lt2" tx2="dk2" accent1="accent1" accent2="accent2" accent3="accent3" accent4="accent4" accent5="accent5" accent6="accent6" hlink="hlink" folHlink="folHlink"/>
   <p:sldLayoutIdLst>
-    <p:sldLayoutId xmlns:r="http://schemas.openxmlformats.org/officeDocument/2006/relationships" id="2147483649" r:id="R363d927da4a642b9"/>
-    <p:sldLayoutId xmlns:r="http://schemas.openxmlformats.org/officeDocument/2006/relationships" id="2147483650" r:id="R3135ea031a04441f"/>
-    <p:sldLayoutId xmlns:r="http://schemas.openxmlformats.org/officeDocument/2006/relationships" id="2147483651" r:id="R2de37040f73b465d"/>
-    <p:sldLayoutId xmlns:r="http://schemas.openxmlformats.org/officeDocument/2006/relationships" id="2147483652" r:id="Rdf1c60f1bdd64944"/>
+    <p:sldLayoutId xmlns:r="http://schemas.openxmlformats.org/officeDocument/2006/relationships" id="2147483649" r:id="R3640ef7ae1b84d28"/>
+    <p:sldLayoutId xmlns:r="http://schemas.openxmlformats.org/officeDocument/2006/relationships" id="2147483650" r:id="Redfa0f8b2d0b4d46"/>
+    <p:sldLayoutId xmlns:r="http://schemas.openxmlformats.org/officeDocument/2006/relationships" id="2147483651" r:id="R45ea3eba627b42f3"/>
+    <p:sldLayoutId xmlns:r="http://schemas.openxmlformats.org/officeDocument/2006/relationships" id="2147483652" r:id="R01d0bc4223b84cdd"/>
   </p:sldLayoutIdLst>
   <p:hf hdr="0" ftr="0" dt="0"/>
   <p:txStyles>
@@ -4098,163 +4194,49 @@
       </p:grpSpPr>
       <p:sp>
         <p:nvSpPr>
-          <p:cNvPr id="3" name="内容占位符 2">
-            <a:extLst xmlns:a="http://schemas.openxmlformats.org/drawingml/2006/main">
-              <a:ext uri="{FF2B5EF4-FFF2-40B4-BE49-F238E27FC236}">
-                <a16:creationId xmlns:a16="http://schemas.microsoft.com/office/drawing/2014/main" id="{D1D30E0E-D2D5-4C08-A919-2A1C2D5A8D02}"/>
-              </a:ext>
-            </a:extLst>
-          </p:cNvPr>
-          <p:cNvSpPr>
-            <a:spLocks xmlns:a="http://schemas.openxmlformats.org/drawingml/2006/main" noGrp="1"/>
-          </p:cNvSpPr>
-          <p:nvPr>
-            <p:ph idx="10"/>
-          </p:nvPr>
-        </p:nvSpPr>
-        <p:spPr>
-          <a:xfrm xmlns:a="http://schemas.openxmlformats.org/drawingml/2006/main">
-            <a:off x="1200150" y="3067050"/>
-            <a:ext cx="9791700" cy="2324100"/>
-          </a:xfrm>
-        </p:spPr>
-        <p:txBody>
-          <a:bodyPr xmlns:a="http://schemas.openxmlformats.org/drawingml/2006/main" lIns="0" tIns="0" rIns="0" bIns="0" anchor="ctr"/>
+          <p:cNvPr id="2" name="矩形 11">
+            <a:extLst xmlns:a="http://schemas.openxmlformats.org/drawingml/2006/main">
+              <a:ext uri="{FF2B5EF4-FFF2-40B4-BE49-F238E27FC236}">
+                <a16:creationId xmlns:a16="http://schemas.microsoft.com/office/drawing/2014/main" id="{27DE90CC-93E2-C662-C202-C5C6993D76E4}"/>
+              </a:ext>
+            </a:extLst>
+          </p:cNvPr>
+          <p:cNvSpPr>
+            <a:spLocks xmlns:a="http://schemas.openxmlformats.org/drawingml/2006/main" noGrp="1"/>
+          </p:cNvSpPr>
+          <p:nvPr/>
+        </p:nvSpPr>
+        <p:spPr>
+          <a:xfrm xmlns:a="http://schemas.openxmlformats.org/drawingml/2006/main">
+            <a:off x="1143000" y="1790700"/>
+            <a:ext cx="9906000" cy="1524000"/>
+          </a:xfrm>
+          <a:prstGeom xmlns:a="http://schemas.openxmlformats.org/drawingml/2006/main" prst="rect">
+            <a:avLst/>
+          </a:prstGeom>
+        </p:spPr>
+        <p:txBody>
+          <a:bodyPr xmlns:a="http://schemas.openxmlformats.org/drawingml/2006/main" lIns="76200" tIns="38100" rIns="76200" bIns="38100" anchor="ctr">
+            <a:spAutoFit/>
+          </a:bodyPr>
           <a:lstStyle xmlns:a="http://schemas.openxmlformats.org/drawingml/2006/main"/>
           <a:p xmlns:a="http://schemas.openxmlformats.org/drawingml/2006/main">
             <a:pPr algn="ctr">
               <a:lnSpc>
-                <a:spcPct val="123000"/>
+                <a:spcPct val="112000"/>
               </a:lnSpc>
               <a:buNone/>
             </a:pPr>
             <a:r>
-              <a:rPr sz="1800" b="1">
-                <a:solidFill>
-                  <a:srgbClr val="18354E"/>
+              <a:rPr sz="2850" b="1">
+                <a:solidFill>
+                  <a:srgbClr val="C8161E"/>
                 </a:solidFill>
                 <a:latin typeface="Microsoft YaHei"/>
                 <a:ea typeface="Microsoft YaHei"/>
                 <a:cs typeface="Microsoft YaHei"/>
               </a:rPr>
-              <a:t>受限循环 → 八要素契约 → 可审计工作流</a:t>
-            </a:r>
-            <a:endParaRPr>
-              <a:latin typeface="+mn-ea"/>
-              <a:ea typeface="+mn-ea"/>
-              <a:cs typeface="+mn-ea"/>
-            </a:endParaRPr>
-          </a:p>
-          <a:p xmlns:a="http://schemas.openxmlformats.org/drawingml/2006/main">
-            <a:r>
-              <a:rPr>
-                <a:latin typeface="+mn-ea"/>
-                <a:ea typeface="+mn-ea"/>
-                <a:cs typeface="+mn-ea"/>
-              </a:rPr>
-              <a:t/>
-            </a:r>
-            <a:endParaRPr>
-              <a:latin typeface="+mn-ea"/>
-              <a:ea typeface="+mn-ea"/>
-              <a:cs typeface="+mn-ea"/>
-            </a:endParaRPr>
-          </a:p>
-          <a:p xmlns:a="http://schemas.openxmlformats.org/drawingml/2006/main">
-            <a:pPr algn="ctr">
-              <a:lnSpc>
-                <a:spcPct val="123000"/>
-              </a:lnSpc>
-              <a:buNone/>
-            </a:pPr>
-            <a:r>
-              <a:rPr sz="1800" b="1">
-                <a:solidFill>
-                  <a:srgbClr val="18354E"/>
-                </a:solidFill>
-                <a:latin typeface="Microsoft YaHei"/>
-                <a:ea typeface="Microsoft YaHei"/>
-                <a:cs typeface="Microsoft YaHei"/>
-              </a:rPr>
-              <a:t>第 11 课给出循环骨架，本课补齐任务、权限、工件、评价与恢复</a:t>
-            </a:r>
-            <a:endParaRPr>
-              <a:latin typeface="+mn-ea"/>
-              <a:ea typeface="+mn-ea"/>
-              <a:cs typeface="+mn-ea"/>
-            </a:endParaRPr>
-          </a:p>
-          <a:p xmlns:a="http://schemas.openxmlformats.org/drawingml/2006/main">
-            <a:pPr algn="ctr">
-              <a:lnSpc>
-                <a:spcPct val="123000"/>
-              </a:lnSpc>
-              <a:buNone/>
-            </a:pPr>
-            <a:r>
-              <a:rPr sz="1800" b="1">
-                <a:solidFill>
-                  <a:srgbClr val="18354E"/>
-                </a:solidFill>
-                <a:latin typeface="Microsoft YaHei"/>
-                <a:ea typeface="Microsoft YaHei"/>
-                <a:cs typeface="Microsoft YaHei"/>
-              </a:rPr>
-              <a:t>第十二讲｜阶段七：原型验证·工作流设计</a:t>
-            </a:r>
-            <a:endParaRPr>
-              <a:latin typeface="+mn-ea"/>
-              <a:ea typeface="+mn-ea"/>
-              <a:cs typeface="+mn-ea"/>
-            </a:endParaRPr>
-          </a:p>
-        </p:txBody>
-      </p:sp>
-      <p:sp>
-        <p:nvSpPr>
-          <p:cNvPr id="2" name="矩形 11">
-            <a:extLst xmlns:a="http://schemas.openxmlformats.org/drawingml/2006/main">
-              <a:ext uri="{FF2B5EF4-FFF2-40B4-BE49-F238E27FC236}">
-                <a16:creationId xmlns:a16="http://schemas.microsoft.com/office/drawing/2014/main" id="{27DE90CC-93E2-C662-C202-C5C6993D76E4}"/>
-              </a:ext>
-            </a:extLst>
-          </p:cNvPr>
-          <p:cNvSpPr>
-            <a:spLocks xmlns:a="http://schemas.openxmlformats.org/drawingml/2006/main" noGrp="1"/>
-          </p:cNvSpPr>
-          <p:nvPr/>
-        </p:nvSpPr>
-        <p:spPr>
-          <a:xfrm xmlns:a="http://schemas.openxmlformats.org/drawingml/2006/main">
-            <a:off x="1000125" y="1219200"/>
-            <a:ext cx="10191750" cy="1581150"/>
-          </a:xfrm>
-          <a:prstGeom xmlns:a="http://schemas.openxmlformats.org/drawingml/2006/main" prst="rect">
-            <a:avLst/>
-          </a:prstGeom>
-        </p:spPr>
-        <p:txBody>
-          <a:bodyPr xmlns:a="http://schemas.openxmlformats.org/drawingml/2006/main" lIns="0" tIns="0" rIns="0" bIns="0" anchor="ctr">
-            <a:spAutoFit/>
-          </a:bodyPr>
-          <a:lstStyle xmlns:a="http://schemas.openxmlformats.org/drawingml/2006/main"/>
-          <a:p xmlns:a="http://schemas.openxmlformats.org/drawingml/2006/main">
-            <a:pPr algn="ctr">
-              <a:lnSpc>
-                <a:spcPct val="150000"/>
-              </a:lnSpc>
-              <a:buNone/>
-            </a:pPr>
-            <a:r>
-              <a:rPr sz="2850" b="1">
-                <a:solidFill>
-                  <a:srgbClr val="C8161E"/>
-                </a:solidFill>
-                <a:latin typeface="Microsoft YaHei"/>
-                <a:ea typeface="Microsoft YaHei"/>
-                <a:cs typeface="Microsoft YaHei"/>
-              </a:rPr>
-              <a:t>从会用 Agent，到看懂谁替你做决定</a:t>
+              <a:t>第12讲 Agent/Skill 逻辑与自主 Research Workflow 设计</a:t>
             </a:r>
             <a:endParaRPr sz="4000" b="1" kern="0" spc="20">
               <a:solidFill>
@@ -4456,6 +4438,7 @@
           <a:lstStyle xmlns:a="http://schemas.openxmlformats.org/drawingml/2006/main"/>
           <a:p xmlns:a="http://schemas.openxmlformats.org/drawingml/2006/main">
             <a:pPr algn="r">
+              <a:buNone/>
               <a:defRPr sz="1350" b="1">
                 <a:solidFill>
                   <a:srgbClr val="18354E"/>
@@ -4509,6 +4492,7 @@
           <a:lstStyle xmlns:a="http://schemas.openxmlformats.org/drawingml/2006/main"/>
           <a:p xmlns:a="http://schemas.openxmlformats.org/drawingml/2006/main">
             <a:pPr algn="ctr">
+              <a:buNone/>
               <a:defRPr sz="1350" b="1">
                 <a:solidFill>
                   <a:srgbClr val="18354E"/>
@@ -4564,6 +4548,7 @@
           <a:lstStyle xmlns:a="http://schemas.openxmlformats.org/drawingml/2006/main"/>
           <a:p xmlns:a="http://schemas.openxmlformats.org/drawingml/2006/main">
             <a:pPr algn="ctr">
+              <a:buNone/>
               <a:defRPr sz="1650" b="1">
                 <a:solidFill>
                   <a:srgbClr val="28745A"/>
@@ -4584,6 +4569,7 @@
           </a:p>
           <a:p xmlns:a="http://schemas.openxmlformats.org/drawingml/2006/main">
             <a:pPr algn="ctr">
+              <a:buNone/>
               <a:defRPr sz="1650" b="1">
                 <a:solidFill>
                   <a:srgbClr val="28745A"/>
@@ -4639,6 +4625,7 @@
           <a:lstStyle xmlns:a="http://schemas.openxmlformats.org/drawingml/2006/main"/>
           <a:p xmlns:a="http://schemas.openxmlformats.org/drawingml/2006/main">
             <a:pPr algn="ctr">
+              <a:buNone/>
               <a:defRPr sz="1650" b="1">
                 <a:solidFill>
                   <a:srgbClr val="2F638A"/>
@@ -4659,6 +4646,7 @@
           </a:p>
           <a:p xmlns:a="http://schemas.openxmlformats.org/drawingml/2006/main">
             <a:pPr algn="ctr">
+              <a:buNone/>
               <a:defRPr sz="1650" b="1">
                 <a:solidFill>
                   <a:srgbClr val="2F638A"/>
@@ -4714,6 +4702,7 @@
           <a:lstStyle xmlns:a="http://schemas.openxmlformats.org/drawingml/2006/main"/>
           <a:p xmlns:a="http://schemas.openxmlformats.org/drawingml/2006/main">
             <a:pPr algn="ctr">
+              <a:buNone/>
               <a:defRPr sz="1650" b="1">
                 <a:solidFill>
                   <a:srgbClr val="C8161E"/>
@@ -4734,6 +4723,7 @@
           </a:p>
           <a:p xmlns:a="http://schemas.openxmlformats.org/drawingml/2006/main">
             <a:pPr algn="ctr">
+              <a:buNone/>
               <a:defRPr sz="1650" b="1">
                 <a:solidFill>
                   <a:srgbClr val="C8161E"/>
@@ -4789,6 +4779,7 @@
           <a:lstStyle xmlns:a="http://schemas.openxmlformats.org/drawingml/2006/main"/>
           <a:p xmlns:a="http://schemas.openxmlformats.org/drawingml/2006/main">
             <a:pPr algn="ctr">
+              <a:buNone/>
               <a:defRPr sz="1575" b="1">
                 <a:solidFill>
                   <a:srgbClr val="A86C12"/>
@@ -4809,6 +4800,7 @@
           </a:p>
           <a:p xmlns:a="http://schemas.openxmlformats.org/drawingml/2006/main">
             <a:pPr algn="ctr">
+              <a:buNone/>
               <a:defRPr sz="1575" b="1">
                 <a:solidFill>
                   <a:srgbClr val="A86C12"/>
@@ -4864,6 +4856,7 @@
           <a:lstStyle xmlns:a="http://schemas.openxmlformats.org/drawingml/2006/main"/>
           <a:p xmlns:a="http://schemas.openxmlformats.org/drawingml/2006/main">
             <a:pPr algn="ctr">
+              <a:buNone/>
               <a:defRPr sz="1500" b="1">
                 <a:solidFill>
                   <a:srgbClr val="C8161E"/>
@@ -5015,6 +5008,7 @@
           <a:lstStyle xmlns:a="http://schemas.openxmlformats.org/drawingml/2006/main"/>
           <a:p xmlns:a="http://schemas.openxmlformats.org/drawingml/2006/main">
             <a:pPr algn="ctr">
+              <a:buNone/>
               <a:defRPr sz="2100" b="1">
                 <a:solidFill>
                   <a:srgbClr val="C8161E"/>
@@ -5103,6 +5097,7 @@
           <a:lstStyle xmlns:a="http://schemas.openxmlformats.org/drawingml/2006/main"/>
           <a:p xmlns:a="http://schemas.openxmlformats.org/drawingml/2006/main">
             <a:pPr algn="ctr">
+              <a:buNone/>
               <a:defRPr sz="1425" b="1">
                 <a:solidFill>
                   <a:srgbClr val="FFFFFF"/>
@@ -5158,6 +5153,7 @@
           <a:lstStyle xmlns:a="http://schemas.openxmlformats.org/drawingml/2006/main"/>
           <a:p xmlns:a="http://schemas.openxmlformats.org/drawingml/2006/main">
             <a:pPr algn="ctr">
+              <a:buNone/>
               <a:defRPr sz="1650" b="1">
                 <a:solidFill>
                   <a:srgbClr val="263746"/>
@@ -5246,6 +5242,7 @@
           <a:lstStyle xmlns:a="http://schemas.openxmlformats.org/drawingml/2006/main"/>
           <a:p xmlns:a="http://schemas.openxmlformats.org/drawingml/2006/main">
             <a:pPr algn="ctr">
+              <a:buNone/>
               <a:defRPr sz="1425" b="1">
                 <a:solidFill>
                   <a:srgbClr val="FFFFFF"/>
@@ -5301,6 +5298,7 @@
           <a:lstStyle xmlns:a="http://schemas.openxmlformats.org/drawingml/2006/main"/>
           <a:p xmlns:a="http://schemas.openxmlformats.org/drawingml/2006/main">
             <a:pPr algn="ctr">
+              <a:buNone/>
               <a:defRPr sz="1650" b="1">
                 <a:solidFill>
                   <a:srgbClr val="263746"/>
@@ -5389,6 +5387,7 @@
           <a:lstStyle xmlns:a="http://schemas.openxmlformats.org/drawingml/2006/main"/>
           <a:p xmlns:a="http://schemas.openxmlformats.org/drawingml/2006/main">
             <a:pPr algn="ctr">
+              <a:buNone/>
               <a:defRPr sz="1425" b="1">
                 <a:solidFill>
                   <a:srgbClr val="FFFFFF"/>
@@ -5444,6 +5443,7 @@
           <a:lstStyle xmlns:a="http://schemas.openxmlformats.org/drawingml/2006/main"/>
           <a:p xmlns:a="http://schemas.openxmlformats.org/drawingml/2006/main">
             <a:pPr algn="ctr">
+              <a:buNone/>
               <a:defRPr sz="1650" b="1">
                 <a:solidFill>
                   <a:srgbClr val="263746"/>
@@ -5499,6 +5499,7 @@
           <a:lstStyle xmlns:a="http://schemas.openxmlformats.org/drawingml/2006/main"/>
           <a:p xmlns:a="http://schemas.openxmlformats.org/drawingml/2006/main">
             <a:pPr algn="ctr">
+              <a:buNone/>
               <a:defRPr sz="1575" b="1">
                 <a:solidFill>
                   <a:srgbClr val="18354E"/>
@@ -5650,6 +5651,7 @@
           <a:lstStyle xmlns:a="http://schemas.openxmlformats.org/drawingml/2006/main"/>
           <a:p xmlns:a="http://schemas.openxmlformats.org/drawingml/2006/main">
             <a:pPr algn="ctr">
+              <a:buNone/>
               <a:defRPr sz="1350" b="1">
                 <a:solidFill>
                   <a:srgbClr val="FFFFFF"/>
@@ -5705,6 +5707,7 @@
           <a:lstStyle xmlns:a="http://schemas.openxmlformats.org/drawingml/2006/main"/>
           <a:p xmlns:a="http://schemas.openxmlformats.org/drawingml/2006/main">
             <a:pPr algn="l">
+              <a:buNone/>
               <a:defRPr sz="1350" b="1">
                 <a:solidFill>
                   <a:srgbClr val="263746"/>
@@ -5762,6 +5765,7 @@
           <a:lstStyle xmlns:a="http://schemas.openxmlformats.org/drawingml/2006/main"/>
           <a:p xmlns:a="http://schemas.openxmlformats.org/drawingml/2006/main">
             <a:pPr algn="ctr">
+              <a:buNone/>
               <a:defRPr sz="1350" b="1">
                 <a:solidFill>
                   <a:srgbClr val="FFFFFF"/>
@@ -5817,6 +5821,7 @@
           <a:lstStyle xmlns:a="http://schemas.openxmlformats.org/drawingml/2006/main"/>
           <a:p xmlns:a="http://schemas.openxmlformats.org/drawingml/2006/main">
             <a:pPr algn="l">
+              <a:buNone/>
               <a:defRPr sz="1350" b="1">
                 <a:solidFill>
                   <a:srgbClr val="263746"/>
@@ -5874,6 +5879,7 @@
           <a:lstStyle xmlns:a="http://schemas.openxmlformats.org/drawingml/2006/main"/>
           <a:p xmlns:a="http://schemas.openxmlformats.org/drawingml/2006/main">
             <a:pPr algn="ctr">
+              <a:buNone/>
               <a:defRPr sz="1350" b="1">
                 <a:solidFill>
                   <a:srgbClr val="FFFFFF"/>
@@ -5929,6 +5935,7 @@
           <a:lstStyle xmlns:a="http://schemas.openxmlformats.org/drawingml/2006/main"/>
           <a:p xmlns:a="http://schemas.openxmlformats.org/drawingml/2006/main">
             <a:pPr algn="l">
+              <a:buNone/>
               <a:defRPr sz="1350" b="1">
                 <a:solidFill>
                   <a:srgbClr val="263746"/>
@@ -5986,6 +5993,7 @@
           <a:lstStyle xmlns:a="http://schemas.openxmlformats.org/drawingml/2006/main"/>
           <a:p xmlns:a="http://schemas.openxmlformats.org/drawingml/2006/main">
             <a:pPr algn="ctr">
+              <a:buNone/>
               <a:defRPr sz="1350" b="1">
                 <a:solidFill>
                   <a:srgbClr val="FFFFFF"/>
@@ -6041,6 +6049,7 @@
           <a:lstStyle xmlns:a="http://schemas.openxmlformats.org/drawingml/2006/main"/>
           <a:p xmlns:a="http://schemas.openxmlformats.org/drawingml/2006/main">
             <a:pPr algn="l">
+              <a:buNone/>
               <a:defRPr sz="1350" b="1">
                 <a:solidFill>
                   <a:srgbClr val="263746"/>
@@ -6098,6 +6107,7 @@
           <a:lstStyle xmlns:a="http://schemas.openxmlformats.org/drawingml/2006/main"/>
           <a:p xmlns:a="http://schemas.openxmlformats.org/drawingml/2006/main">
             <a:pPr algn="ctr">
+              <a:buNone/>
               <a:defRPr sz="1350" b="1">
                 <a:solidFill>
                   <a:srgbClr val="FFFFFF"/>
@@ -6153,6 +6163,7 @@
           <a:lstStyle xmlns:a="http://schemas.openxmlformats.org/drawingml/2006/main"/>
           <a:p xmlns:a="http://schemas.openxmlformats.org/drawingml/2006/main">
             <a:pPr algn="l">
+              <a:buNone/>
               <a:defRPr sz="1350" b="1">
                 <a:solidFill>
                   <a:srgbClr val="263746"/>
@@ -6210,6 +6221,7 @@
           <a:lstStyle xmlns:a="http://schemas.openxmlformats.org/drawingml/2006/main"/>
           <a:p xmlns:a="http://schemas.openxmlformats.org/drawingml/2006/main">
             <a:pPr algn="ctr">
+              <a:buNone/>
               <a:defRPr sz="1350" b="1">
                 <a:solidFill>
                   <a:srgbClr val="FFFFFF"/>
@@ -6265,6 +6277,7 @@
           <a:lstStyle xmlns:a="http://schemas.openxmlformats.org/drawingml/2006/main"/>
           <a:p xmlns:a="http://schemas.openxmlformats.org/drawingml/2006/main">
             <a:pPr algn="l">
+              <a:buNone/>
               <a:defRPr sz="1350" b="1">
                 <a:solidFill>
                   <a:srgbClr val="263746"/>
@@ -6322,6 +6335,7 @@
           <a:lstStyle xmlns:a="http://schemas.openxmlformats.org/drawingml/2006/main"/>
           <a:p xmlns:a="http://schemas.openxmlformats.org/drawingml/2006/main">
             <a:pPr algn="ctr">
+              <a:buNone/>
               <a:defRPr sz="1350" b="1">
                 <a:solidFill>
                   <a:srgbClr val="FFFFFF"/>
@@ -6377,6 +6391,7 @@
           <a:lstStyle xmlns:a="http://schemas.openxmlformats.org/drawingml/2006/main"/>
           <a:p xmlns:a="http://schemas.openxmlformats.org/drawingml/2006/main">
             <a:pPr algn="l">
+              <a:buNone/>
               <a:defRPr sz="1350" b="1">
                 <a:solidFill>
                   <a:srgbClr val="263746"/>
@@ -6434,6 +6449,7 @@
           <a:lstStyle xmlns:a="http://schemas.openxmlformats.org/drawingml/2006/main"/>
           <a:p xmlns:a="http://schemas.openxmlformats.org/drawingml/2006/main">
             <a:pPr algn="ctr">
+              <a:buNone/>
               <a:defRPr sz="1350" b="1">
                 <a:solidFill>
                   <a:srgbClr val="FFFFFF"/>
@@ -6489,6 +6505,7 @@
           <a:lstStyle xmlns:a="http://schemas.openxmlformats.org/drawingml/2006/main"/>
           <a:p xmlns:a="http://schemas.openxmlformats.org/drawingml/2006/main">
             <a:pPr algn="l">
+              <a:buNone/>
               <a:defRPr sz="1350" b="1">
                 <a:solidFill>
                   <a:srgbClr val="263746"/>
@@ -6544,6 +6561,7 @@
           <a:lstStyle xmlns:a="http://schemas.openxmlformats.org/drawingml/2006/main"/>
           <a:p xmlns:a="http://schemas.openxmlformats.org/drawingml/2006/main">
             <a:pPr algn="ctr">
+              <a:buNone/>
               <a:defRPr sz="1650" b="1">
                 <a:solidFill>
                   <a:srgbClr val="C8161E"/>
@@ -6695,6 +6713,7 @@
           <a:lstStyle xmlns:a="http://schemas.openxmlformats.org/drawingml/2006/main"/>
           <a:p xmlns:a="http://schemas.openxmlformats.org/drawingml/2006/main">
             <a:pPr algn="ctr">
+              <a:buNone/>
               <a:defRPr sz="1350" b="1">
                 <a:solidFill>
                   <a:srgbClr val="FFFFFF"/>
@@ -6750,6 +6769,7 @@
           <a:lstStyle xmlns:a="http://schemas.openxmlformats.org/drawingml/2006/main"/>
           <a:p xmlns:a="http://schemas.openxmlformats.org/drawingml/2006/main">
             <a:pPr algn="l">
+              <a:buNone/>
               <a:defRPr sz="1350" b="1">
                 <a:solidFill>
                   <a:srgbClr val="263746"/>
@@ -6807,6 +6827,7 @@
           <a:lstStyle xmlns:a="http://schemas.openxmlformats.org/drawingml/2006/main"/>
           <a:p xmlns:a="http://schemas.openxmlformats.org/drawingml/2006/main">
             <a:pPr algn="ctr">
+              <a:buNone/>
               <a:defRPr sz="1350" b="1">
                 <a:solidFill>
                   <a:srgbClr val="FFFFFF"/>
@@ -6862,6 +6883,7 @@
           <a:lstStyle xmlns:a="http://schemas.openxmlformats.org/drawingml/2006/main"/>
           <a:p xmlns:a="http://schemas.openxmlformats.org/drawingml/2006/main">
             <a:pPr algn="l">
+              <a:buNone/>
               <a:defRPr sz="1350" b="1">
                 <a:solidFill>
                   <a:srgbClr val="263746"/>
@@ -6919,6 +6941,7 @@
           <a:lstStyle xmlns:a="http://schemas.openxmlformats.org/drawingml/2006/main"/>
           <a:p xmlns:a="http://schemas.openxmlformats.org/drawingml/2006/main">
             <a:pPr algn="ctr">
+              <a:buNone/>
               <a:defRPr sz="1350" b="1">
                 <a:solidFill>
                   <a:srgbClr val="FFFFFF"/>
@@ -6974,6 +6997,7 @@
           <a:lstStyle xmlns:a="http://schemas.openxmlformats.org/drawingml/2006/main"/>
           <a:p xmlns:a="http://schemas.openxmlformats.org/drawingml/2006/main">
             <a:pPr algn="l">
+              <a:buNone/>
               <a:defRPr sz="1350" b="1">
                 <a:solidFill>
                   <a:srgbClr val="263746"/>
@@ -7031,6 +7055,7 @@
           <a:lstStyle xmlns:a="http://schemas.openxmlformats.org/drawingml/2006/main"/>
           <a:p xmlns:a="http://schemas.openxmlformats.org/drawingml/2006/main">
             <a:pPr algn="ctr">
+              <a:buNone/>
               <a:defRPr sz="1350" b="1">
                 <a:solidFill>
                   <a:srgbClr val="FFFFFF"/>
@@ -7086,6 +7111,7 @@
           <a:lstStyle xmlns:a="http://schemas.openxmlformats.org/drawingml/2006/main"/>
           <a:p xmlns:a="http://schemas.openxmlformats.org/drawingml/2006/main">
             <a:pPr algn="l">
+              <a:buNone/>
               <a:defRPr sz="1350" b="1">
                 <a:solidFill>
                   <a:srgbClr val="263746"/>
@@ -7143,6 +7169,7 @@
           <a:lstStyle xmlns:a="http://schemas.openxmlformats.org/drawingml/2006/main"/>
           <a:p xmlns:a="http://schemas.openxmlformats.org/drawingml/2006/main">
             <a:pPr algn="ctr">
+              <a:buNone/>
               <a:defRPr sz="1350" b="1">
                 <a:solidFill>
                   <a:srgbClr val="FFFFFF"/>
@@ -7198,6 +7225,7 @@
           <a:lstStyle xmlns:a="http://schemas.openxmlformats.org/drawingml/2006/main"/>
           <a:p xmlns:a="http://schemas.openxmlformats.org/drawingml/2006/main">
             <a:pPr algn="l">
+              <a:buNone/>
               <a:defRPr sz="1350" b="1">
                 <a:solidFill>
                   <a:srgbClr val="263746"/>
@@ -7284,6 +7312,7 @@
           <a:lstStyle xmlns:a="http://schemas.openxmlformats.org/drawingml/2006/main"/>
           <a:p xmlns:a="http://schemas.openxmlformats.org/drawingml/2006/main">
             <a:pPr algn="ctr">
+              <a:buNone/>
               <a:defRPr sz="2100" b="1">
                 <a:solidFill>
                   <a:srgbClr val="C8161E"/>
@@ -7472,6 +7501,7 @@
           <a:lstStyle xmlns:a="http://schemas.openxmlformats.org/drawingml/2006/main"/>
           <a:p xmlns:a="http://schemas.openxmlformats.org/drawingml/2006/main">
             <a:pPr algn="ctr">
+              <a:buNone/>
               <a:defRPr sz="1575" b="1">
                 <a:solidFill>
                   <a:srgbClr val="263746"/>
@@ -7619,6 +7649,7 @@
           <a:lstStyle xmlns:a="http://schemas.openxmlformats.org/drawingml/2006/main"/>
           <a:p xmlns:a="http://schemas.openxmlformats.org/drawingml/2006/main">
             <a:pPr algn="r">
+              <a:buNone/>
               <a:defRPr sz="1200" b="1">
                 <a:solidFill>
                   <a:srgbClr val="C8161E"/>
@@ -7676,6 +7707,7 @@
           <a:lstStyle xmlns:a="http://schemas.openxmlformats.org/drawingml/2006/main"/>
           <a:p xmlns:a="http://schemas.openxmlformats.org/drawingml/2006/main">
             <a:pPr algn="ctr">
+              <a:buNone/>
               <a:defRPr sz="1650" b="1">
                 <a:solidFill>
                   <a:srgbClr val="18354E"/>
@@ -7696,6 +7728,7 @@
           </a:p>
           <a:p xmlns:a="http://schemas.openxmlformats.org/drawingml/2006/main">
             <a:pPr algn="ctr">
+              <a:buNone/>
               <a:defRPr sz="1650" b="1">
                 <a:solidFill>
                   <a:srgbClr val="18354E"/>
@@ -7749,6 +7782,7 @@
           <a:lstStyle xmlns:a="http://schemas.openxmlformats.org/drawingml/2006/main"/>
           <a:p xmlns:a="http://schemas.openxmlformats.org/drawingml/2006/main">
             <a:pPr algn="ctr">
+              <a:buNone/>
               <a:defRPr sz="2400" b="1">
                 <a:solidFill>
                   <a:srgbClr val="C8161E"/>
@@ -7806,6 +7840,7 @@
           <a:lstStyle xmlns:a="http://schemas.openxmlformats.org/drawingml/2006/main"/>
           <a:p xmlns:a="http://schemas.openxmlformats.org/drawingml/2006/main">
             <a:pPr algn="ctr">
+              <a:buNone/>
               <a:defRPr sz="1650" b="1">
                 <a:solidFill>
                   <a:srgbClr val="18354E"/>
@@ -7826,6 +7861,7 @@
           </a:p>
           <a:p xmlns:a="http://schemas.openxmlformats.org/drawingml/2006/main">
             <a:pPr algn="ctr">
+              <a:buNone/>
               <a:defRPr sz="1650" b="1">
                 <a:solidFill>
                   <a:srgbClr val="18354E"/>
@@ -7879,6 +7915,7 @@
           <a:lstStyle xmlns:a="http://schemas.openxmlformats.org/drawingml/2006/main"/>
           <a:p xmlns:a="http://schemas.openxmlformats.org/drawingml/2006/main">
             <a:pPr algn="ctr">
+              <a:buNone/>
               <a:defRPr sz="2400" b="1">
                 <a:solidFill>
                   <a:srgbClr val="C8161E"/>
@@ -7936,6 +7973,7 @@
           <a:lstStyle xmlns:a="http://schemas.openxmlformats.org/drawingml/2006/main"/>
           <a:p xmlns:a="http://schemas.openxmlformats.org/drawingml/2006/main">
             <a:pPr algn="ctr">
+              <a:buNone/>
               <a:defRPr sz="1650" b="1">
                 <a:solidFill>
                   <a:srgbClr val="18354E"/>
@@ -7956,6 +7994,7 @@
           </a:p>
           <a:p xmlns:a="http://schemas.openxmlformats.org/drawingml/2006/main">
             <a:pPr algn="ctr">
+              <a:buNone/>
               <a:defRPr sz="1650" b="1">
                 <a:solidFill>
                   <a:srgbClr val="18354E"/>
@@ -8009,6 +8048,7 @@
           <a:lstStyle xmlns:a="http://schemas.openxmlformats.org/drawingml/2006/main"/>
           <a:p xmlns:a="http://schemas.openxmlformats.org/drawingml/2006/main">
             <a:pPr algn="ctr">
+              <a:buNone/>
               <a:defRPr sz="2400" b="1">
                 <a:solidFill>
                   <a:srgbClr val="C8161E"/>
@@ -8066,6 +8106,7 @@
           <a:lstStyle xmlns:a="http://schemas.openxmlformats.org/drawingml/2006/main"/>
           <a:p xmlns:a="http://schemas.openxmlformats.org/drawingml/2006/main">
             <a:pPr algn="ctr">
+              <a:buNone/>
               <a:defRPr sz="1650" b="1">
                 <a:solidFill>
                   <a:srgbClr val="C8161E"/>
@@ -8086,6 +8127,7 @@
           </a:p>
           <a:p xmlns:a="http://schemas.openxmlformats.org/drawingml/2006/main">
             <a:pPr algn="ctr">
+              <a:buNone/>
               <a:defRPr sz="1650" b="1">
                 <a:solidFill>
                   <a:srgbClr val="C8161E"/>
@@ -8141,6 +8183,7 @@
           <a:lstStyle xmlns:a="http://schemas.openxmlformats.org/drawingml/2006/main"/>
           <a:p xmlns:a="http://schemas.openxmlformats.org/drawingml/2006/main">
             <a:pPr algn="ctr">
+              <a:buNone/>
               <a:defRPr sz="1725" b="1">
                 <a:solidFill>
                   <a:srgbClr val="C8161E"/>
@@ -8196,6 +8239,7 @@
           <a:lstStyle xmlns:a="http://schemas.openxmlformats.org/drawingml/2006/main"/>
           <a:p xmlns:a="http://schemas.openxmlformats.org/drawingml/2006/main">
             <a:pPr algn="ctr">
+              <a:buNone/>
               <a:defRPr sz="1575" b="1">
                 <a:solidFill>
                   <a:srgbClr val="18354E"/>
@@ -8343,6 +8387,7 @@
           <a:lstStyle xmlns:a="http://schemas.openxmlformats.org/drawingml/2006/main"/>
           <a:p xmlns:a="http://schemas.openxmlformats.org/drawingml/2006/main">
             <a:pPr algn="r">
+              <a:buNone/>
               <a:defRPr sz="1125" b="1">
                 <a:solidFill>
                   <a:srgbClr val="C8161E"/>
@@ -8605,6 +8650,7 @@
           <a:lstStyle xmlns:a="http://schemas.openxmlformats.org/drawingml/2006/main"/>
           <a:p xmlns:a="http://schemas.openxmlformats.org/drawingml/2006/main">
             <a:pPr algn="ctr">
+              <a:buNone/>
               <a:defRPr sz="1350" b="1">
                 <a:solidFill>
                   <a:srgbClr val="FFFFFF"/>
@@ -8660,6 +8706,7 @@
           <a:lstStyle xmlns:a="http://schemas.openxmlformats.org/drawingml/2006/main"/>
           <a:p xmlns:a="http://schemas.openxmlformats.org/drawingml/2006/main">
             <a:pPr algn="l">
+              <a:buNone/>
               <a:defRPr sz="1650" b="1">
                 <a:solidFill>
                   <a:srgbClr val="263746"/>
@@ -8717,6 +8764,7 @@
           <a:lstStyle xmlns:a="http://schemas.openxmlformats.org/drawingml/2006/main"/>
           <a:p xmlns:a="http://schemas.openxmlformats.org/drawingml/2006/main">
             <a:pPr algn="ctr">
+              <a:buNone/>
               <a:defRPr sz="1350" b="1">
                 <a:solidFill>
                   <a:srgbClr val="FFFFFF"/>
@@ -8772,6 +8820,7 @@
           <a:lstStyle xmlns:a="http://schemas.openxmlformats.org/drawingml/2006/main"/>
           <a:p xmlns:a="http://schemas.openxmlformats.org/drawingml/2006/main">
             <a:pPr algn="l">
+              <a:buNone/>
               <a:defRPr sz="1650" b="1">
                 <a:solidFill>
                   <a:srgbClr val="263746"/>
@@ -8829,6 +8878,7 @@
           <a:lstStyle xmlns:a="http://schemas.openxmlformats.org/drawingml/2006/main"/>
           <a:p xmlns:a="http://schemas.openxmlformats.org/drawingml/2006/main">
             <a:pPr algn="ctr">
+              <a:buNone/>
               <a:defRPr sz="1350" b="1">
                 <a:solidFill>
                   <a:srgbClr val="FFFFFF"/>
@@ -8884,6 +8934,7 @@
           <a:lstStyle xmlns:a="http://schemas.openxmlformats.org/drawingml/2006/main"/>
           <a:p xmlns:a="http://schemas.openxmlformats.org/drawingml/2006/main">
             <a:pPr algn="l">
+              <a:buNone/>
               <a:defRPr sz="1650" b="1">
                 <a:solidFill>
                   <a:srgbClr val="263746"/>
@@ -8941,6 +8992,7 @@
           <a:lstStyle xmlns:a="http://schemas.openxmlformats.org/drawingml/2006/main"/>
           <a:p xmlns:a="http://schemas.openxmlformats.org/drawingml/2006/main">
             <a:pPr algn="ctr">
+              <a:buNone/>
               <a:defRPr sz="1350" b="1">
                 <a:solidFill>
                   <a:srgbClr val="FFFFFF"/>
@@ -8996,6 +9048,7 @@
           <a:lstStyle xmlns:a="http://schemas.openxmlformats.org/drawingml/2006/main"/>
           <a:p xmlns:a="http://schemas.openxmlformats.org/drawingml/2006/main">
             <a:pPr algn="l">
+              <a:buNone/>
               <a:defRPr sz="1650" b="1">
                 <a:solidFill>
                   <a:srgbClr val="C8161E"/>
@@ -9051,6 +9104,7 @@
           <a:lstStyle xmlns:a="http://schemas.openxmlformats.org/drawingml/2006/main"/>
           <a:p xmlns:a="http://schemas.openxmlformats.org/drawingml/2006/main">
             <a:pPr algn="ctr">
+              <a:buNone/>
               <a:defRPr sz="1650" b="1">
                 <a:solidFill>
                   <a:srgbClr val="C8161E"/>
@@ -9200,6 +9254,7 @@
           <a:lstStyle xmlns:a="http://schemas.openxmlformats.org/drawingml/2006/main"/>
           <a:p xmlns:a="http://schemas.openxmlformats.org/drawingml/2006/main">
             <a:pPr algn="ctr">
+              <a:buNone/>
               <a:defRPr sz="1800" b="1">
                 <a:solidFill>
                   <a:srgbClr val="C8161E"/>
@@ -9340,6 +9395,7 @@
           <a:lstStyle xmlns:a="http://schemas.openxmlformats.org/drawingml/2006/main"/>
           <a:p xmlns:a="http://schemas.openxmlformats.org/drawingml/2006/main">
             <a:pPr algn="ctr">
+              <a:buNone/>
               <a:defRPr sz="2700" b="1">
                 <a:solidFill>
                   <a:srgbClr val="C8161E"/>
@@ -9480,6 +9536,7 @@
           <a:lstStyle xmlns:a="http://schemas.openxmlformats.org/drawingml/2006/main"/>
           <a:p xmlns:a="http://schemas.openxmlformats.org/drawingml/2006/main">
             <a:pPr algn="ctr">
+              <a:buNone/>
               <a:defRPr sz="2700" b="1">
                 <a:solidFill>
                   <a:srgbClr val="C8161E"/>
@@ -9829,6 +9886,7 @@
           <a:lstStyle xmlns:a="http://schemas.openxmlformats.org/drawingml/2006/main"/>
           <a:p xmlns:a="http://schemas.openxmlformats.org/drawingml/2006/main">
             <a:pPr algn="ctr">
+              <a:buNone/>
               <a:defRPr sz="4800" b="1">
                 <a:solidFill>
                   <a:srgbClr val="C8161E"/>
@@ -9882,6 +9940,7 @@
           <a:lstStyle xmlns:a="http://schemas.openxmlformats.org/drawingml/2006/main"/>
           <a:p xmlns:a="http://schemas.openxmlformats.org/drawingml/2006/main">
             <a:pPr algn="ctr">
+              <a:buNone/>
               <a:defRPr sz="1425" b="1">
                 <a:solidFill>
                   <a:srgbClr val="18354E"/>
@@ -9939,6 +9998,7 @@
           <a:lstStyle xmlns:a="http://schemas.openxmlformats.org/drawingml/2006/main"/>
           <a:p xmlns:a="http://schemas.openxmlformats.org/drawingml/2006/main">
             <a:pPr algn="ctr">
+              <a:buNone/>
               <a:defRPr sz="1425" b="1">
                 <a:solidFill>
                   <a:srgbClr val="FFFFFF"/>
@@ -9994,6 +10054,7 @@
           <a:lstStyle xmlns:a="http://schemas.openxmlformats.org/drawingml/2006/main"/>
           <a:p xmlns:a="http://schemas.openxmlformats.org/drawingml/2006/main">
             <a:pPr algn="l">
+              <a:buNone/>
               <a:defRPr sz="1725" b="1">
                 <a:solidFill>
                   <a:srgbClr val="263746"/>
@@ -10051,6 +10112,7 @@
           <a:lstStyle xmlns:a="http://schemas.openxmlformats.org/drawingml/2006/main"/>
           <a:p xmlns:a="http://schemas.openxmlformats.org/drawingml/2006/main">
             <a:pPr algn="ctr">
+              <a:buNone/>
               <a:defRPr sz="1425" b="1">
                 <a:solidFill>
                   <a:srgbClr val="FFFFFF"/>
@@ -10106,6 +10168,7 @@
           <a:lstStyle xmlns:a="http://schemas.openxmlformats.org/drawingml/2006/main"/>
           <a:p xmlns:a="http://schemas.openxmlformats.org/drawingml/2006/main">
             <a:pPr algn="l">
+              <a:buNone/>
               <a:defRPr sz="1725" b="1">
                 <a:solidFill>
                   <a:srgbClr val="263746"/>
@@ -10163,6 +10226,7 @@
           <a:lstStyle xmlns:a="http://schemas.openxmlformats.org/drawingml/2006/main"/>
           <a:p xmlns:a="http://schemas.openxmlformats.org/drawingml/2006/main">
             <a:pPr algn="ctr">
+              <a:buNone/>
               <a:defRPr sz="1425" b="1">
                 <a:solidFill>
                   <a:srgbClr val="FFFFFF"/>
@@ -10218,6 +10282,7 @@
           <a:lstStyle xmlns:a="http://schemas.openxmlformats.org/drawingml/2006/main"/>
           <a:p xmlns:a="http://schemas.openxmlformats.org/drawingml/2006/main">
             <a:pPr algn="l">
+              <a:buNone/>
               <a:defRPr sz="1725" b="1">
                 <a:solidFill>
                   <a:srgbClr val="263746"/>
@@ -10275,6 +10340,7 @@
           <a:lstStyle xmlns:a="http://schemas.openxmlformats.org/drawingml/2006/main"/>
           <a:p xmlns:a="http://schemas.openxmlformats.org/drawingml/2006/main">
             <a:pPr algn="ctr">
+              <a:buNone/>
               <a:defRPr sz="1425" b="1">
                 <a:solidFill>
                   <a:srgbClr val="FFFFFF"/>
@@ -10330,6 +10396,7 @@
           <a:lstStyle xmlns:a="http://schemas.openxmlformats.org/drawingml/2006/main"/>
           <a:p xmlns:a="http://schemas.openxmlformats.org/drawingml/2006/main">
             <a:pPr algn="l">
+              <a:buNone/>
               <a:defRPr sz="1725" b="1">
                 <a:solidFill>
                   <a:srgbClr val="C8161E"/>
@@ -10385,6 +10452,7 @@
           <a:lstStyle xmlns:a="http://schemas.openxmlformats.org/drawingml/2006/main"/>
           <a:p xmlns:a="http://schemas.openxmlformats.org/drawingml/2006/main">
             <a:pPr algn="ctr">
+              <a:buNone/>
               <a:defRPr sz="1650" b="1">
                 <a:solidFill>
                   <a:srgbClr val="18354E"/>
@@ -10538,6 +10606,7 @@
           <a:lstStyle xmlns:a="http://schemas.openxmlformats.org/drawingml/2006/main"/>
           <a:p xmlns:a="http://schemas.openxmlformats.org/drawingml/2006/main">
             <a:pPr algn="l">
+              <a:buNone/>
               <a:defRPr sz="1800" b="1">
                 <a:solidFill>
                   <a:srgbClr val="263746"/>
@@ -10597,6 +10666,7 @@
           <a:lstStyle xmlns:a="http://schemas.openxmlformats.org/drawingml/2006/main"/>
           <a:p xmlns:a="http://schemas.openxmlformats.org/drawingml/2006/main">
             <a:pPr algn="l">
+              <a:buNone/>
               <a:defRPr sz="1800" b="1">
                 <a:solidFill>
                   <a:srgbClr val="263746"/>
@@ -10656,6 +10726,7 @@
           <a:lstStyle xmlns:a="http://schemas.openxmlformats.org/drawingml/2006/main"/>
           <a:p xmlns:a="http://schemas.openxmlformats.org/drawingml/2006/main">
             <a:pPr algn="l">
+              <a:buNone/>
               <a:defRPr sz="1800" b="1">
                 <a:solidFill>
                   <a:srgbClr val="263746"/>
@@ -10715,6 +10786,7 @@
           <a:lstStyle xmlns:a="http://schemas.openxmlformats.org/drawingml/2006/main"/>
           <a:p xmlns:a="http://schemas.openxmlformats.org/drawingml/2006/main">
             <a:pPr algn="l">
+              <a:buNone/>
               <a:defRPr sz="1800" b="1">
                 <a:solidFill>
                   <a:srgbClr val="263746"/>
@@ -10774,6 +10846,7 @@
           <a:lstStyle xmlns:a="http://schemas.openxmlformats.org/drawingml/2006/main"/>
           <a:p xmlns:a="http://schemas.openxmlformats.org/drawingml/2006/main">
             <a:pPr algn="l">
+              <a:buNone/>
               <a:defRPr sz="1800" b="1">
                 <a:solidFill>
                   <a:srgbClr val="263746"/>
@@ -10833,6 +10906,7 @@
           <a:lstStyle xmlns:a="http://schemas.openxmlformats.org/drawingml/2006/main"/>
           <a:p xmlns:a="http://schemas.openxmlformats.org/drawingml/2006/main">
             <a:pPr algn="l">
+              <a:buNone/>
               <a:defRPr sz="1800" b="1">
                 <a:solidFill>
                   <a:srgbClr val="263746"/>
@@ -10892,6 +10966,7 @@
           <a:lstStyle xmlns:a="http://schemas.openxmlformats.org/drawingml/2006/main"/>
           <a:p xmlns:a="http://schemas.openxmlformats.org/drawingml/2006/main">
             <a:pPr algn="l">
+              <a:buNone/>
               <a:defRPr sz="1800" b="1">
                 <a:solidFill>
                   <a:srgbClr val="263746"/>
@@ -10951,6 +11026,7 @@
           <a:lstStyle xmlns:a="http://schemas.openxmlformats.org/drawingml/2006/main"/>
           <a:p xmlns:a="http://schemas.openxmlformats.org/drawingml/2006/main">
             <a:pPr algn="l">
+              <a:buNone/>
               <a:defRPr sz="1800" b="1">
                 <a:solidFill>
                   <a:srgbClr val="C8161E"/>
@@ -11006,6 +11082,7 @@
           <a:lstStyle xmlns:a="http://schemas.openxmlformats.org/drawingml/2006/main"/>
           <a:p xmlns:a="http://schemas.openxmlformats.org/drawingml/2006/main">
             <a:pPr algn="ctr">
+              <a:buNone/>
               <a:defRPr sz="1800" b="1">
                 <a:solidFill>
                   <a:srgbClr val="C8161E"/>
@@ -11157,6 +11234,7 @@
           <a:lstStyle xmlns:a="http://schemas.openxmlformats.org/drawingml/2006/main"/>
           <a:p xmlns:a="http://schemas.openxmlformats.org/drawingml/2006/main">
             <a:pPr algn="ctr">
+              <a:buNone/>
               <a:defRPr sz="1500" b="1">
                 <a:solidFill>
                   <a:srgbClr val="FFFFFF"/>
@@ -11212,6 +11290,7 @@
           <a:lstStyle xmlns:a="http://schemas.openxmlformats.org/drawingml/2006/main"/>
           <a:p xmlns:a="http://schemas.openxmlformats.org/drawingml/2006/main">
             <a:pPr algn="ctr">
+              <a:buNone/>
               <a:defRPr sz="1650" b="1">
                 <a:solidFill>
                   <a:srgbClr val="18354E"/>
@@ -11267,6 +11346,7 @@
           <a:lstStyle xmlns:a="http://schemas.openxmlformats.org/drawingml/2006/main"/>
           <a:p xmlns:a="http://schemas.openxmlformats.org/drawingml/2006/main">
             <a:pPr algn="l">
+              <a:buNone/>
               <a:defRPr sz="1725" b="1">
                 <a:solidFill>
                   <a:srgbClr val="263746"/>
@@ -11324,6 +11404,7 @@
           <a:lstStyle xmlns:a="http://schemas.openxmlformats.org/drawingml/2006/main"/>
           <a:p xmlns:a="http://schemas.openxmlformats.org/drawingml/2006/main">
             <a:pPr algn="ctr">
+              <a:buNone/>
               <a:defRPr sz="1500" b="1">
                 <a:solidFill>
                   <a:srgbClr val="FFFFFF"/>
@@ -11379,6 +11460,7 @@
           <a:lstStyle xmlns:a="http://schemas.openxmlformats.org/drawingml/2006/main"/>
           <a:p xmlns:a="http://schemas.openxmlformats.org/drawingml/2006/main">
             <a:pPr algn="ctr">
+              <a:buNone/>
               <a:defRPr sz="1650" b="1">
                 <a:solidFill>
                   <a:srgbClr val="C8161E"/>
@@ -11434,6 +11516,7 @@
           <a:lstStyle xmlns:a="http://schemas.openxmlformats.org/drawingml/2006/main"/>
           <a:p xmlns:a="http://schemas.openxmlformats.org/drawingml/2006/main">
             <a:pPr algn="l">
+              <a:buNone/>
               <a:defRPr sz="1725" b="1">
                 <a:solidFill>
                   <a:srgbClr val="263746"/>
@@ -11491,6 +11574,7 @@
           <a:lstStyle xmlns:a="http://schemas.openxmlformats.org/drawingml/2006/main"/>
           <a:p xmlns:a="http://schemas.openxmlformats.org/drawingml/2006/main">
             <a:pPr algn="ctr">
+              <a:buNone/>
               <a:defRPr sz="1500" b="1">
                 <a:solidFill>
                   <a:srgbClr val="FFFFFF"/>
@@ -11546,6 +11630,7 @@
           <a:lstStyle xmlns:a="http://schemas.openxmlformats.org/drawingml/2006/main"/>
           <a:p xmlns:a="http://schemas.openxmlformats.org/drawingml/2006/main">
             <a:pPr algn="ctr">
+              <a:buNone/>
               <a:defRPr sz="1650" b="1">
                 <a:solidFill>
                   <a:srgbClr val="18354E"/>
@@ -11601,6 +11686,7 @@
           <a:lstStyle xmlns:a="http://schemas.openxmlformats.org/drawingml/2006/main"/>
           <a:p xmlns:a="http://schemas.openxmlformats.org/drawingml/2006/main">
             <a:pPr algn="l">
+              <a:buNone/>
               <a:defRPr sz="1725" b="1">
                 <a:solidFill>
                   <a:srgbClr val="263746"/>
@@ -11656,6 +11742,7 @@
           <a:lstStyle xmlns:a="http://schemas.openxmlformats.org/drawingml/2006/main"/>
           <a:p xmlns:a="http://schemas.openxmlformats.org/drawingml/2006/main">
             <a:pPr algn="ctr">
+              <a:buNone/>
               <a:defRPr sz="1725" b="1">
                 <a:solidFill>
                   <a:srgbClr val="C8161E"/>
@@ -11807,6 +11894,7 @@
           <a:lstStyle xmlns:a="http://schemas.openxmlformats.org/drawingml/2006/main"/>
           <a:p xmlns:a="http://schemas.openxmlformats.org/drawingml/2006/main">
             <a:pPr algn="ctr">
+              <a:buNone/>
               <a:defRPr sz="1350" b="1">
                 <a:solidFill>
                   <a:srgbClr val="FFFFFF"/>
@@ -11862,6 +11950,7 @@
           <a:lstStyle xmlns:a="http://schemas.openxmlformats.org/drawingml/2006/main"/>
           <a:p xmlns:a="http://schemas.openxmlformats.org/drawingml/2006/main">
             <a:pPr algn="l">
+              <a:buNone/>
               <a:defRPr sz="1425" b="1">
                 <a:solidFill>
                   <a:srgbClr val="263746"/>
@@ -11950,6 +12039,7 @@
           <a:lstStyle xmlns:a="http://schemas.openxmlformats.org/drawingml/2006/main"/>
           <a:p xmlns:a="http://schemas.openxmlformats.org/drawingml/2006/main">
             <a:pPr algn="ctr">
+              <a:buNone/>
               <a:defRPr sz="1350" b="1">
                 <a:solidFill>
                   <a:srgbClr val="FFFFFF"/>
@@ -12005,6 +12095,7 @@
           <a:lstStyle xmlns:a="http://schemas.openxmlformats.org/drawingml/2006/main"/>
           <a:p xmlns:a="http://schemas.openxmlformats.org/drawingml/2006/main">
             <a:pPr algn="l">
+              <a:buNone/>
               <a:defRPr sz="1425" b="1">
                 <a:solidFill>
                   <a:srgbClr val="263746"/>
@@ -12093,6 +12184,7 @@
           <a:lstStyle xmlns:a="http://schemas.openxmlformats.org/drawingml/2006/main"/>
           <a:p xmlns:a="http://schemas.openxmlformats.org/drawingml/2006/main">
             <a:pPr algn="ctr">
+              <a:buNone/>
               <a:defRPr sz="1350" b="1">
                 <a:solidFill>
                   <a:srgbClr val="FFFFFF"/>
@@ -12148,6 +12240,7 @@
           <a:lstStyle xmlns:a="http://schemas.openxmlformats.org/drawingml/2006/main"/>
           <a:p xmlns:a="http://schemas.openxmlformats.org/drawingml/2006/main">
             <a:pPr algn="l">
+              <a:buNone/>
               <a:defRPr sz="1425" b="1">
                 <a:solidFill>
                   <a:srgbClr val="263746"/>
@@ -12236,6 +12329,7 @@
           <a:lstStyle xmlns:a="http://schemas.openxmlformats.org/drawingml/2006/main"/>
           <a:p xmlns:a="http://schemas.openxmlformats.org/drawingml/2006/main">
             <a:pPr algn="ctr">
+              <a:buNone/>
               <a:defRPr sz="1350" b="1">
                 <a:solidFill>
                   <a:srgbClr val="FFFFFF"/>
@@ -12291,6 +12385,7 @@
           <a:lstStyle xmlns:a="http://schemas.openxmlformats.org/drawingml/2006/main"/>
           <a:p xmlns:a="http://schemas.openxmlformats.org/drawingml/2006/main">
             <a:pPr algn="l">
+              <a:buNone/>
               <a:defRPr sz="1425" b="1">
                 <a:solidFill>
                   <a:srgbClr val="263746"/>
@@ -12348,6 +12443,7 @@
           <a:lstStyle xmlns:a="http://schemas.openxmlformats.org/drawingml/2006/main"/>
           <a:p xmlns:a="http://schemas.openxmlformats.org/drawingml/2006/main">
             <a:pPr algn="ctr">
+              <a:buNone/>
               <a:defRPr sz="1350" b="1">
                 <a:solidFill>
                   <a:srgbClr val="FFFFFF"/>
@@ -12403,6 +12499,7 @@
           <a:lstStyle xmlns:a="http://schemas.openxmlformats.org/drawingml/2006/main"/>
           <a:p xmlns:a="http://schemas.openxmlformats.org/drawingml/2006/main">
             <a:pPr algn="l">
+              <a:buNone/>
               <a:defRPr sz="1425" b="1">
                 <a:solidFill>
                   <a:srgbClr val="263746"/>
@@ -12491,6 +12588,7 @@
           <a:lstStyle xmlns:a="http://schemas.openxmlformats.org/drawingml/2006/main"/>
           <a:p xmlns:a="http://schemas.openxmlformats.org/drawingml/2006/main">
             <a:pPr algn="ctr">
+              <a:buNone/>
               <a:defRPr sz="1350" b="1">
                 <a:solidFill>
                   <a:srgbClr val="FFFFFF"/>
@@ -12546,6 +12644,7 @@
           <a:lstStyle xmlns:a="http://schemas.openxmlformats.org/drawingml/2006/main"/>
           <a:p xmlns:a="http://schemas.openxmlformats.org/drawingml/2006/main">
             <a:pPr algn="l">
+              <a:buNone/>
               <a:defRPr sz="1425" b="1">
                 <a:solidFill>
                   <a:srgbClr val="263746"/>
@@ -12634,6 +12733,7 @@
           <a:lstStyle xmlns:a="http://schemas.openxmlformats.org/drawingml/2006/main"/>
           <a:p xmlns:a="http://schemas.openxmlformats.org/drawingml/2006/main">
             <a:pPr algn="ctr">
+              <a:buNone/>
               <a:defRPr sz="1350" b="1">
                 <a:solidFill>
                   <a:srgbClr val="FFFFFF"/>
@@ -12689,6 +12789,7 @@
           <a:lstStyle xmlns:a="http://schemas.openxmlformats.org/drawingml/2006/main"/>
           <a:p xmlns:a="http://schemas.openxmlformats.org/drawingml/2006/main">
             <a:pPr algn="l">
+              <a:buNone/>
               <a:defRPr sz="1425" b="1">
                 <a:solidFill>
                   <a:srgbClr val="263746"/>
@@ -12777,6 +12878,7 @@
           <a:lstStyle xmlns:a="http://schemas.openxmlformats.org/drawingml/2006/main"/>
           <a:p xmlns:a="http://schemas.openxmlformats.org/drawingml/2006/main">
             <a:pPr algn="ctr">
+              <a:buNone/>
               <a:defRPr sz="1350" b="1">
                 <a:solidFill>
                   <a:srgbClr val="FFFFFF"/>
@@ -12832,6 +12934,7 @@
           <a:lstStyle xmlns:a="http://schemas.openxmlformats.org/drawingml/2006/main"/>
           <a:p xmlns:a="http://schemas.openxmlformats.org/drawingml/2006/main">
             <a:pPr algn="l">
+              <a:buNone/>
               <a:defRPr sz="1425" b="1">
                 <a:solidFill>
                   <a:srgbClr val="C8161E"/>
@@ -12949,6 +13052,7 @@
           <a:lstStyle xmlns:a="http://schemas.openxmlformats.org/drawingml/2006/main"/>
           <a:p xmlns:a="http://schemas.openxmlformats.org/drawingml/2006/main">
             <a:pPr algn="ctr">
+              <a:buNone/>
               <a:defRPr sz="1725" b="1">
                 <a:solidFill>
                   <a:srgbClr val="18354E"/>
@@ -13004,6 +13108,7 @@
           <a:lstStyle xmlns:a="http://schemas.openxmlformats.org/drawingml/2006/main"/>
           <a:p xmlns:a="http://schemas.openxmlformats.org/drawingml/2006/main">
             <a:pPr algn="ctr">
+              <a:buNone/>
               <a:defRPr sz="1650" b="1">
                 <a:solidFill>
                   <a:srgbClr val="C8161E"/>
@@ -13069,14 +13174,17 @@
           </a:xfrm>
         </p:spPr>
         <p:txBody>
-          <a:bodyPr xmlns:a="http://schemas.openxmlformats.org/drawingml/2006/main" lIns="76200" tIns="0" rIns="76200" bIns="0" anchor="ctr"/>
+          <a:bodyPr xmlns:a="http://schemas.openxmlformats.org/drawingml/2006/main" lIns="76200" tIns="38100" rIns="76200" bIns="38100" anchor="ctr"/>
           <a:lstStyle xmlns:a="http://schemas.openxmlformats.org/drawingml/2006/main"/>
           <a:p xmlns:a="http://schemas.openxmlformats.org/drawingml/2006/main">
             <a:pPr algn="l">
-              <a:buNone/>
-            </a:pPr>
-            <a:r>
-              <a:rPr sz="2175" b="1">
+              <a:lnSpc>
+                <a:spcPct val="112000"/>
+              </a:lnSpc>
+              <a:buNone/>
+            </a:pPr>
+            <a:r>
+              <a:rPr sz="2250" b="1">
                 <a:solidFill>
                   <a:srgbClr val="FFFFFF"/>
                 </a:solidFill>
@@ -13084,7 +13192,7 @@
                 <a:ea typeface="Microsoft YaHei"/>
                 <a:cs typeface="Microsoft YaHei"/>
               </a:rPr>
-              <a:t>退出卡：把设计带到第 13 课实际验证</a:t>
+              <a:t>本讲知识点总结</a:t>
             </a:r>
             <a:endParaRPr/>
           </a:p>
@@ -13120,74 +13228,21 @@
       </p:sp>
       <p:sp>
         <p:nvSpPr>
-          <p:cNvPr id="6" name="p20-left-title">
-            <a:extLst xmlns:a="http://schemas.openxmlformats.org/drawingml/2006/main">
-              <a:ext uri="{FF2B5EF4-FFF2-40B4-BE49-F238E27FC236}">
-                <a16:creationId xmlns:a16="http://schemas.microsoft.com/office/drawing/2014/main" id="{94A62A7F-F181-44A1-93DF-CF6643549B28}"/>
-              </a:ext>
-            </a:extLst>
-          </p:cNvPr>
-          <p:cNvSpPr>
-            <a:spLocks xmlns:a="http://schemas.openxmlformats.org/drawingml/2006/main" noGrp="1"/>
-          </p:cNvSpPr>
-          <p:nvPr/>
-        </p:nvSpPr>
-        <p:spPr>
-          <a:xfrm xmlns:a="http://schemas.openxmlformats.org/drawingml/2006/main">
-            <a:off x="609600" y="1009650"/>
-            <a:ext cx="4914900" cy="495300"/>
-          </a:xfrm>
-          <a:prstGeom xmlns:a="http://schemas.openxmlformats.org/drawingml/2006/main" prst="rect">
-            <a:avLst/>
-          </a:prstGeom>
-          <a:noFill xmlns:a="http://schemas.openxmlformats.org/drawingml/2006/main"/>
-          <a:ln xmlns:a="http://schemas.openxmlformats.org/drawingml/2006/main" w="0">
-            <a:noFill/>
-            <a:prstDash val="solid"/>
-          </a:ln>
-        </p:spPr>
-        <p:txBody>
-          <a:bodyPr xmlns:a="http://schemas.openxmlformats.org/drawingml/2006/main" lIns="76200" tIns="38100" rIns="76200" bIns="38100" anchor="ctr"/>
-          <a:lstStyle xmlns:a="http://schemas.openxmlformats.org/drawingml/2006/main"/>
-          <a:p xmlns:a="http://schemas.openxmlformats.org/drawingml/2006/main">
-            <a:pPr algn="ctr">
-              <a:defRPr sz="1950" b="1">
-                <a:solidFill>
-                  <a:srgbClr val="18354E"/>
-                </a:solidFill>
-              </a:defRPr>
-            </a:pPr>
-            <a:r>
-              <a:rPr sz="1950" b="1">
-                <a:solidFill>
-                  <a:srgbClr val="18354E"/>
-                </a:solidFill>
-                <a:latin typeface="Microsoft YaHei"/>
-                <a:ea typeface="Microsoft YaHei"/>
-                <a:cs typeface="Microsoft YaHei"/>
-              </a:rPr>
-              <a:t>退出卡｜现在能回答</a:t>
-            </a:r>
-          </a:p>
-        </p:txBody>
-      </p:sp>
-      <p:sp>
-        <p:nvSpPr>
-          <p:cNvPr id="7" name="p20-n0">
-            <a:extLst xmlns:a="http://schemas.openxmlformats.org/drawingml/2006/main">
-              <a:ext uri="{FF2B5EF4-FFF2-40B4-BE49-F238E27FC236}">
-                <a16:creationId xmlns:a16="http://schemas.microsoft.com/office/drawing/2014/main" id="{A241A69B-97FA-468F-ADB3-F1F5008A5F17}"/>
-              </a:ext>
-            </a:extLst>
-          </p:cNvPr>
-          <p:cNvSpPr>
-            <a:spLocks xmlns:a="http://schemas.openxmlformats.org/drawingml/2006/main" noGrp="1"/>
-          </p:cNvSpPr>
-          <p:nvPr/>
-        </p:nvSpPr>
-        <p:spPr>
-          <a:xfrm xmlns:a="http://schemas.openxmlformats.org/drawingml/2006/main">
-            <a:off x="685800" y="1733550"/>
+          <p:cNvPr id="6" name="summary-12-number-0">
+            <a:extLst xmlns:a="http://schemas.openxmlformats.org/drawingml/2006/main">
+              <a:ext uri="{FF2B5EF4-FFF2-40B4-BE49-F238E27FC236}">
+                <a16:creationId xmlns:a16="http://schemas.microsoft.com/office/drawing/2014/main" id="{D78215B2-9BBD-44A0-A481-771CEC7F094B}"/>
+              </a:ext>
+            </a:extLst>
+          </p:cNvPr>
+          <p:cNvSpPr>
+            <a:spLocks xmlns:a="http://schemas.openxmlformats.org/drawingml/2006/main" noGrp="1"/>
+          </p:cNvSpPr>
+          <p:nvPr/>
+        </p:nvSpPr>
+        <p:spPr>
+          <a:xfrm xmlns:a="http://schemas.openxmlformats.org/drawingml/2006/main">
+            <a:off x="457200" y="1219200"/>
             <a:ext cx="476250" cy="476250"/>
           </a:xfrm>
           <a:prstGeom xmlns:a="http://schemas.openxmlformats.org/drawingml/2006/main" prst="roundRect">
@@ -13208,14 +13263,18 @@
           <a:lstStyle xmlns:a="http://schemas.openxmlformats.org/drawingml/2006/main"/>
           <a:p xmlns:a="http://schemas.openxmlformats.org/drawingml/2006/main">
             <a:pPr algn="ctr">
-              <a:defRPr sz="1350" b="1">
+              <a:lnSpc>
+                <a:spcPct val="112000"/>
+              </a:lnSpc>
+              <a:buNone/>
+              <a:defRPr sz="1500" b="1">
                 <a:solidFill>
                   <a:srgbClr val="FFFFFF"/>
                 </a:solidFill>
               </a:defRPr>
             </a:pPr>
             <a:r>
-              <a:rPr sz="1350" b="1">
+              <a:rPr sz="1500" b="1">
                 <a:solidFill>
                   <a:srgbClr val="FFFFFF"/>
                 </a:solidFill>
@@ -13230,76 +13289,145 @@
       </p:sp>
       <p:sp>
         <p:nvSpPr>
-          <p:cNvPr id="8" name="p20-t0">
-            <a:extLst xmlns:a="http://schemas.openxmlformats.org/drawingml/2006/main">
-              <a:ext uri="{FF2B5EF4-FFF2-40B4-BE49-F238E27FC236}">
-                <a16:creationId xmlns:a16="http://schemas.microsoft.com/office/drawing/2014/main" id="{2D5F7C62-FA88-4D0A-A366-F53A39C44B99}"/>
-              </a:ext>
-            </a:extLst>
-          </p:cNvPr>
-          <p:cNvSpPr>
-            <a:spLocks xmlns:a="http://schemas.openxmlformats.org/drawingml/2006/main" noGrp="1"/>
-          </p:cNvSpPr>
-          <p:nvPr/>
-        </p:nvSpPr>
-        <p:spPr>
-          <a:xfrm xmlns:a="http://schemas.openxmlformats.org/drawingml/2006/main">
-            <a:off x="1333500" y="1733550"/>
-            <a:ext cx="4057650" cy="476250"/>
-          </a:xfrm>
-          <a:prstGeom xmlns:a="http://schemas.openxmlformats.org/drawingml/2006/main" prst="rect">
-            <a:avLst/>
-          </a:prstGeom>
-          <a:solidFill xmlns:a="http://schemas.openxmlformats.org/drawingml/2006/main">
-            <a:srgbClr val="F3F6F7"/>
-          </a:solidFill>
-          <a:ln xmlns:a="http://schemas.openxmlformats.org/drawingml/2006/main" w="0">
-            <a:noFill/>
-            <a:prstDash val="solid"/>
-          </a:ln>
-        </p:spPr>
-        <p:txBody>
-          <a:bodyPr xmlns:a="http://schemas.openxmlformats.org/drawingml/2006/main" lIns="76200" tIns="38100" rIns="76200" bIns="38100" anchor="ctr"/>
-          <a:lstStyle xmlns:a="http://schemas.openxmlformats.org/drawingml/2006/main"/>
-          <a:p xmlns:a="http://schemas.openxmlformats.org/drawingml/2006/main">
-            <a:pPr algn="l">
-              <a:defRPr sz="1575" b="1">
-                <a:solidFill>
-                  <a:srgbClr val="263746"/>
-                </a:solidFill>
-              </a:defRPr>
-            </a:pPr>
-            <a:r>
-              <a:rPr sz="1575" b="1">
-                <a:solidFill>
-                  <a:srgbClr val="263746"/>
+          <p:cNvPr id="7" name="summary-12-heading-0">
+            <a:extLst xmlns:a="http://schemas.openxmlformats.org/drawingml/2006/main">
+              <a:ext uri="{FF2B5EF4-FFF2-40B4-BE49-F238E27FC236}">
+                <a16:creationId xmlns:a16="http://schemas.microsoft.com/office/drawing/2014/main" id="{0D5E136E-8ADC-42DC-B953-0BCEFE32217B}"/>
+              </a:ext>
+            </a:extLst>
+          </p:cNvPr>
+          <p:cNvSpPr>
+            <a:spLocks xmlns:a="http://schemas.openxmlformats.org/drawingml/2006/main" noGrp="1"/>
+          </p:cNvSpPr>
+          <p:nvPr/>
+        </p:nvSpPr>
+        <p:spPr>
+          <a:xfrm xmlns:a="http://schemas.openxmlformats.org/drawingml/2006/main">
+            <a:off x="1028700" y="1162050"/>
+            <a:ext cx="2152650" cy="590550"/>
+          </a:xfrm>
+          <a:prstGeom xmlns:a="http://schemas.openxmlformats.org/drawingml/2006/main" prst="roundRect">
+            <a:avLst>
+              <a:gd name="adj" fmla="val 12903"/>
+            </a:avLst>
+          </a:prstGeom>
+          <a:solidFill xmlns:a="http://schemas.openxmlformats.org/drawingml/2006/main">
+            <a:srgbClr val="E8F0F6"/>
+          </a:solidFill>
+          <a:ln xmlns:a="http://schemas.openxmlformats.org/drawingml/2006/main" w="0">
+            <a:noFill/>
+            <a:prstDash val="solid"/>
+          </a:ln>
+        </p:spPr>
+        <p:txBody>
+          <a:bodyPr xmlns:a="http://schemas.openxmlformats.org/drawingml/2006/main" lIns="76200" tIns="38100" rIns="76200" bIns="38100" anchor="ctr"/>
+          <a:lstStyle xmlns:a="http://schemas.openxmlformats.org/drawingml/2006/main"/>
+          <a:p xmlns:a="http://schemas.openxmlformats.org/drawingml/2006/main">
+            <a:pPr algn="ctr">
+              <a:lnSpc>
+                <a:spcPct val="112000"/>
+              </a:lnSpc>
+              <a:buNone/>
+              <a:defRPr sz="1725" b="1">
+                <a:solidFill>
+                  <a:srgbClr val="18354E"/>
+                </a:solidFill>
+              </a:defRPr>
+            </a:pPr>
+            <a:r>
+              <a:rPr sz="1725" b="1">
+                <a:solidFill>
+                  <a:srgbClr val="18354E"/>
                 </a:solidFill>
                 <a:latin typeface="Microsoft YaHei"/>
                 <a:ea typeface="Microsoft YaHei"/>
                 <a:cs typeface="Microsoft YaHei"/>
               </a:rPr>
-              <a:t>我的工作流最危险的权限是？</a:t>
-            </a:r>
-          </a:p>
-        </p:txBody>
-      </p:sp>
-      <p:sp>
-        <p:nvSpPr>
-          <p:cNvPr id="9" name="p20-n1">
-            <a:extLst xmlns:a="http://schemas.openxmlformats.org/drawingml/2006/main">
-              <a:ext uri="{FF2B5EF4-FFF2-40B4-BE49-F238E27FC236}">
-                <a16:creationId xmlns:a16="http://schemas.microsoft.com/office/drawing/2014/main" id="{6B130874-DC53-4F64-90AE-A0C3AFECB468}"/>
-              </a:ext>
-            </a:extLst>
-          </p:cNvPr>
-          <p:cNvSpPr>
-            <a:spLocks xmlns:a="http://schemas.openxmlformats.org/drawingml/2006/main" noGrp="1"/>
-          </p:cNvSpPr>
-          <p:nvPr/>
-        </p:nvSpPr>
-        <p:spPr>
-          <a:xfrm xmlns:a="http://schemas.openxmlformats.org/drawingml/2006/main">
-            <a:off x="685800" y="2590800"/>
+              <a:t>八要素契约</a:t>
+            </a:r>
+          </a:p>
+        </p:txBody>
+      </p:sp>
+      <p:sp>
+        <p:nvSpPr>
+          <p:cNvPr id="8" name="summary-12-detail-0">
+            <a:extLst xmlns:a="http://schemas.openxmlformats.org/drawingml/2006/main">
+              <a:ext uri="{FF2B5EF4-FFF2-40B4-BE49-F238E27FC236}">
+                <a16:creationId xmlns:a16="http://schemas.microsoft.com/office/drawing/2014/main" id="{08CDBF7F-8C6A-49D1-93E4-EA1D8960625C}"/>
+              </a:ext>
+            </a:extLst>
+          </p:cNvPr>
+          <p:cNvSpPr>
+            <a:spLocks xmlns:a="http://schemas.openxmlformats.org/drawingml/2006/main" noGrp="1"/>
+          </p:cNvSpPr>
+          <p:nvPr/>
+        </p:nvSpPr>
+        <p:spPr>
+          <a:xfrm xmlns:a="http://schemas.openxmlformats.org/drawingml/2006/main">
+            <a:off x="457200" y="2095500"/>
+            <a:ext cx="2724150" cy="1676400"/>
+          </a:xfrm>
+          <a:prstGeom xmlns:a="http://schemas.openxmlformats.org/drawingml/2006/main" prst="roundRect">
+            <a:avLst>
+              <a:gd name="adj" fmla="val 4545"/>
+            </a:avLst>
+          </a:prstGeom>
+          <a:solidFill xmlns:a="http://schemas.openxmlformats.org/drawingml/2006/main">
+            <a:srgbClr val="FFFFFF"/>
+          </a:solidFill>
+          <a:ln xmlns:a="http://schemas.openxmlformats.org/drawingml/2006/main" w="9525">
+            <a:solidFill>
+              <a:srgbClr val="D6DDE2"/>
+            </a:solidFill>
+            <a:prstDash val="solid"/>
+          </a:ln>
+        </p:spPr>
+        <p:txBody>
+          <a:bodyPr xmlns:a="http://schemas.openxmlformats.org/drawingml/2006/main" lIns="76200" tIns="38100" rIns="76200" bIns="38100" anchor="ctr"/>
+          <a:lstStyle xmlns:a="http://schemas.openxmlformats.org/drawingml/2006/main"/>
+          <a:p xmlns:a="http://schemas.openxmlformats.org/drawingml/2006/main">
+            <a:pPr algn="ctr">
+              <a:lnSpc>
+                <a:spcPct val="116000"/>
+              </a:lnSpc>
+              <a:buNone/>
+              <a:defRPr sz="1500" b="1">
+                <a:solidFill>
+                  <a:srgbClr val="263746"/>
+                </a:solidFill>
+              </a:defRPr>
+            </a:pPr>
+            <a:r>
+              <a:rPr sz="1500" b="1">
+                <a:solidFill>
+                  <a:srgbClr val="263746"/>
+                </a:solidFill>
+                <a:latin typeface="Microsoft YaHei"/>
+                <a:ea typeface="Microsoft YaHei"/>
+                <a:cs typeface="Microsoft YaHei"/>
+              </a:rPr>
+              <a:t>任务、Context、状态、权限、循环、追踪、Evals 与恢复</a:t>
+            </a:r>
+          </a:p>
+        </p:txBody>
+      </p:sp>
+      <p:sp>
+        <p:nvSpPr>
+          <p:cNvPr id="9" name="summary-12-number-1">
+            <a:extLst xmlns:a="http://schemas.openxmlformats.org/drawingml/2006/main">
+              <a:ext uri="{FF2B5EF4-FFF2-40B4-BE49-F238E27FC236}">
+                <a16:creationId xmlns:a16="http://schemas.microsoft.com/office/drawing/2014/main" id="{9018E1D4-E229-4995-8C22-68B07108930D}"/>
+              </a:ext>
+            </a:extLst>
+          </p:cNvPr>
+          <p:cNvSpPr>
+            <a:spLocks xmlns:a="http://schemas.openxmlformats.org/drawingml/2006/main" noGrp="1"/>
+          </p:cNvSpPr>
+          <p:nvPr/>
+        </p:nvSpPr>
+        <p:spPr>
+          <a:xfrm xmlns:a="http://schemas.openxmlformats.org/drawingml/2006/main">
+            <a:off x="3371850" y="1219200"/>
             <a:ext cx="476250" cy="476250"/>
           </a:xfrm>
           <a:prstGeom xmlns:a="http://schemas.openxmlformats.org/drawingml/2006/main" prst="roundRect">
@@ -13308,7 +13436,7 @@
             </a:avLst>
           </a:prstGeom>
           <a:solidFill xmlns:a="http://schemas.openxmlformats.org/drawingml/2006/main">
-            <a:srgbClr val="18354E"/>
+            <a:srgbClr val="28745A"/>
           </a:solidFill>
           <a:ln xmlns:a="http://schemas.openxmlformats.org/drawingml/2006/main" w="0">
             <a:noFill/>
@@ -13320,14 +13448,18 @@
           <a:lstStyle xmlns:a="http://schemas.openxmlformats.org/drawingml/2006/main"/>
           <a:p xmlns:a="http://schemas.openxmlformats.org/drawingml/2006/main">
             <a:pPr algn="ctr">
-              <a:defRPr sz="1350" b="1">
+              <a:lnSpc>
+                <a:spcPct val="112000"/>
+              </a:lnSpc>
+              <a:buNone/>
+              <a:defRPr sz="1500" b="1">
                 <a:solidFill>
                   <a:srgbClr val="FFFFFF"/>
                 </a:solidFill>
               </a:defRPr>
             </a:pPr>
             <a:r>
-              <a:rPr sz="1350" b="1">
+              <a:rPr sz="1500" b="1">
                 <a:solidFill>
                   <a:srgbClr val="FFFFFF"/>
                 </a:solidFill>
@@ -13342,76 +13474,145 @@
       </p:sp>
       <p:sp>
         <p:nvSpPr>
-          <p:cNvPr id="10" name="p20-t1">
-            <a:extLst xmlns:a="http://schemas.openxmlformats.org/drawingml/2006/main">
-              <a:ext uri="{FF2B5EF4-FFF2-40B4-BE49-F238E27FC236}">
-                <a16:creationId xmlns:a16="http://schemas.microsoft.com/office/drawing/2014/main" id="{836415F6-9793-4FA0-9BF2-F9721554335B}"/>
-              </a:ext>
-            </a:extLst>
-          </p:cNvPr>
-          <p:cNvSpPr>
-            <a:spLocks xmlns:a="http://schemas.openxmlformats.org/drawingml/2006/main" noGrp="1"/>
-          </p:cNvSpPr>
-          <p:nvPr/>
-        </p:nvSpPr>
-        <p:spPr>
-          <a:xfrm xmlns:a="http://schemas.openxmlformats.org/drawingml/2006/main">
-            <a:off x="1333500" y="2590800"/>
-            <a:ext cx="4057650" cy="476250"/>
-          </a:xfrm>
-          <a:prstGeom xmlns:a="http://schemas.openxmlformats.org/drawingml/2006/main" prst="rect">
-            <a:avLst/>
-          </a:prstGeom>
-          <a:solidFill xmlns:a="http://schemas.openxmlformats.org/drawingml/2006/main">
-            <a:srgbClr val="F3F6F7"/>
-          </a:solidFill>
-          <a:ln xmlns:a="http://schemas.openxmlformats.org/drawingml/2006/main" w="0">
-            <a:noFill/>
-            <a:prstDash val="solid"/>
-          </a:ln>
-        </p:spPr>
-        <p:txBody>
-          <a:bodyPr xmlns:a="http://schemas.openxmlformats.org/drawingml/2006/main" lIns="76200" tIns="38100" rIns="76200" bIns="38100" anchor="ctr"/>
-          <a:lstStyle xmlns:a="http://schemas.openxmlformats.org/drawingml/2006/main"/>
-          <a:p xmlns:a="http://schemas.openxmlformats.org/drawingml/2006/main">
-            <a:pPr algn="l">
-              <a:defRPr sz="1575" b="1">
-                <a:solidFill>
-                  <a:srgbClr val="263746"/>
-                </a:solidFill>
-              </a:defRPr>
-            </a:pPr>
-            <a:r>
-              <a:rPr sz="1575" b="1">
-                <a:solidFill>
-                  <a:srgbClr val="263746"/>
+          <p:cNvPr id="10" name="summary-12-heading-1">
+            <a:extLst xmlns:a="http://schemas.openxmlformats.org/drawingml/2006/main">
+              <a:ext uri="{FF2B5EF4-FFF2-40B4-BE49-F238E27FC236}">
+                <a16:creationId xmlns:a16="http://schemas.microsoft.com/office/drawing/2014/main" id="{EC5CDAE9-424C-472F-802A-6C516A08B56E}"/>
+              </a:ext>
+            </a:extLst>
+          </p:cNvPr>
+          <p:cNvSpPr>
+            <a:spLocks xmlns:a="http://schemas.openxmlformats.org/drawingml/2006/main" noGrp="1"/>
+          </p:cNvSpPr>
+          <p:nvPr/>
+        </p:nvSpPr>
+        <p:spPr>
+          <a:xfrm xmlns:a="http://schemas.openxmlformats.org/drawingml/2006/main">
+            <a:off x="3943350" y="1162050"/>
+            <a:ext cx="2152650" cy="590550"/>
+          </a:xfrm>
+          <a:prstGeom xmlns:a="http://schemas.openxmlformats.org/drawingml/2006/main" prst="roundRect">
+            <a:avLst>
+              <a:gd name="adj" fmla="val 12903"/>
+            </a:avLst>
+          </a:prstGeom>
+          <a:solidFill xmlns:a="http://schemas.openxmlformats.org/drawingml/2006/main">
+            <a:srgbClr val="E7F2ED"/>
+          </a:solidFill>
+          <a:ln xmlns:a="http://schemas.openxmlformats.org/drawingml/2006/main" w="0">
+            <a:noFill/>
+            <a:prstDash val="solid"/>
+          </a:ln>
+        </p:spPr>
+        <p:txBody>
+          <a:bodyPr xmlns:a="http://schemas.openxmlformats.org/drawingml/2006/main" lIns="76200" tIns="38100" rIns="76200" bIns="38100" anchor="ctr"/>
+          <a:lstStyle xmlns:a="http://schemas.openxmlformats.org/drawingml/2006/main"/>
+          <a:p xmlns:a="http://schemas.openxmlformats.org/drawingml/2006/main">
+            <a:pPr algn="ctr">
+              <a:lnSpc>
+                <a:spcPct val="112000"/>
+              </a:lnSpc>
+              <a:buNone/>
+              <a:defRPr sz="1725" b="1">
+                <a:solidFill>
+                  <a:srgbClr val="28745A"/>
+                </a:solidFill>
+              </a:defRPr>
+            </a:pPr>
+            <a:r>
+              <a:rPr sz="1725" b="1">
+                <a:solidFill>
+                  <a:srgbClr val="28745A"/>
                 </a:solidFill>
                 <a:latin typeface="Microsoft YaHei"/>
                 <a:ea typeface="Microsoft YaHei"/>
                 <a:cs typeface="Microsoft YaHei"/>
               </a:rPr>
-              <a:t>哪项八要素仍为空？</a:t>
-            </a:r>
-          </a:p>
-        </p:txBody>
-      </p:sp>
-      <p:sp>
-        <p:nvSpPr>
-          <p:cNvPr id="11" name="p20-n2">
-            <a:extLst xmlns:a="http://schemas.openxmlformats.org/drawingml/2006/main">
-              <a:ext uri="{FF2B5EF4-FFF2-40B4-BE49-F238E27FC236}">
-                <a16:creationId xmlns:a16="http://schemas.microsoft.com/office/drawing/2014/main" id="{C32C02EA-66A7-437B-B7FF-934A270C22C3}"/>
-              </a:ext>
-            </a:extLst>
-          </p:cNvPr>
-          <p:cNvSpPr>
-            <a:spLocks xmlns:a="http://schemas.openxmlformats.org/drawingml/2006/main" noGrp="1"/>
-          </p:cNvSpPr>
-          <p:nvPr/>
-        </p:nvSpPr>
-        <p:spPr>
-          <a:xfrm xmlns:a="http://schemas.openxmlformats.org/drawingml/2006/main">
-            <a:off x="685800" y="3448050"/>
+              <a:t>权限设计</a:t>
+            </a:r>
+          </a:p>
+        </p:txBody>
+      </p:sp>
+      <p:sp>
+        <p:nvSpPr>
+          <p:cNvPr id="11" name="summary-12-detail-1">
+            <a:extLst xmlns:a="http://schemas.openxmlformats.org/drawingml/2006/main">
+              <a:ext uri="{FF2B5EF4-FFF2-40B4-BE49-F238E27FC236}">
+                <a16:creationId xmlns:a16="http://schemas.microsoft.com/office/drawing/2014/main" id="{5E50C65D-1374-4942-872B-944F7CC12D06}"/>
+              </a:ext>
+            </a:extLst>
+          </p:cNvPr>
+          <p:cNvSpPr>
+            <a:spLocks xmlns:a="http://schemas.openxmlformats.org/drawingml/2006/main" noGrp="1"/>
+          </p:cNvSpPr>
+          <p:nvPr/>
+        </p:nvSpPr>
+        <p:spPr>
+          <a:xfrm xmlns:a="http://schemas.openxmlformats.org/drawingml/2006/main">
+            <a:off x="3371850" y="2095500"/>
+            <a:ext cx="2724150" cy="1676400"/>
+          </a:xfrm>
+          <a:prstGeom xmlns:a="http://schemas.openxmlformats.org/drawingml/2006/main" prst="roundRect">
+            <a:avLst>
+              <a:gd name="adj" fmla="val 4545"/>
+            </a:avLst>
+          </a:prstGeom>
+          <a:solidFill xmlns:a="http://schemas.openxmlformats.org/drawingml/2006/main">
+            <a:srgbClr val="FFFFFF"/>
+          </a:solidFill>
+          <a:ln xmlns:a="http://schemas.openxmlformats.org/drawingml/2006/main" w="9525">
+            <a:solidFill>
+              <a:srgbClr val="D6DDE2"/>
+            </a:solidFill>
+            <a:prstDash val="solid"/>
+          </a:ln>
+        </p:spPr>
+        <p:txBody>
+          <a:bodyPr xmlns:a="http://schemas.openxmlformats.org/drawingml/2006/main" lIns="76200" tIns="38100" rIns="76200" bIns="38100" anchor="ctr"/>
+          <a:lstStyle xmlns:a="http://schemas.openxmlformats.org/drawingml/2006/main"/>
+          <a:p xmlns:a="http://schemas.openxmlformats.org/drawingml/2006/main">
+            <a:pPr algn="ctr">
+              <a:lnSpc>
+                <a:spcPct val="116000"/>
+              </a:lnSpc>
+              <a:buNone/>
+              <a:defRPr sz="1500" b="1">
+                <a:solidFill>
+                  <a:srgbClr val="263746"/>
+                </a:solidFill>
+              </a:defRPr>
+            </a:pPr>
+            <a:r>
+              <a:rPr sz="1500" b="1">
+                <a:solidFill>
+                  <a:srgbClr val="263746"/>
+                </a:solidFill>
+                <a:latin typeface="Microsoft YaHei"/>
+                <a:ea typeface="Microsoft YaHei"/>
+                <a:cs typeface="Microsoft YaHei"/>
+              </a:rPr>
+              <a:t>工具能力与风险分层，越权和外部动作设置确认点</a:t>
+            </a:r>
+          </a:p>
+        </p:txBody>
+      </p:sp>
+      <p:sp>
+        <p:nvSpPr>
+          <p:cNvPr id="12" name="summary-12-number-2">
+            <a:extLst xmlns:a="http://schemas.openxmlformats.org/drawingml/2006/main">
+              <a:ext uri="{FF2B5EF4-FFF2-40B4-BE49-F238E27FC236}">
+                <a16:creationId xmlns:a16="http://schemas.microsoft.com/office/drawing/2014/main" id="{E726554D-4418-462F-9C62-DCD294C4B98C}"/>
+              </a:ext>
+            </a:extLst>
+          </p:cNvPr>
+          <p:cNvSpPr>
+            <a:spLocks xmlns:a="http://schemas.openxmlformats.org/drawingml/2006/main" noGrp="1"/>
+          </p:cNvSpPr>
+          <p:nvPr/>
+        </p:nvSpPr>
+        <p:spPr>
+          <a:xfrm xmlns:a="http://schemas.openxmlformats.org/drawingml/2006/main">
+            <a:off x="6286500" y="1219200"/>
             <a:ext cx="476250" cy="476250"/>
           </a:xfrm>
           <a:prstGeom xmlns:a="http://schemas.openxmlformats.org/drawingml/2006/main" prst="roundRect">
@@ -13432,14 +13633,18 @@
           <a:lstStyle xmlns:a="http://schemas.openxmlformats.org/drawingml/2006/main"/>
           <a:p xmlns:a="http://schemas.openxmlformats.org/drawingml/2006/main">
             <a:pPr algn="ctr">
-              <a:defRPr sz="1350" b="1">
+              <a:lnSpc>
+                <a:spcPct val="112000"/>
+              </a:lnSpc>
+              <a:buNone/>
+              <a:defRPr sz="1500" b="1">
                 <a:solidFill>
                   <a:srgbClr val="FFFFFF"/>
                 </a:solidFill>
               </a:defRPr>
             </a:pPr>
             <a:r>
-              <a:rPr sz="1350" b="1">
+              <a:rPr sz="1500" b="1">
                 <a:solidFill>
                   <a:srgbClr val="FFFFFF"/>
                 </a:solidFill>
@@ -13454,25 +13659,27 @@
       </p:sp>
       <p:sp>
         <p:nvSpPr>
-          <p:cNvPr id="12" name="p20-t2">
-            <a:extLst xmlns:a="http://schemas.openxmlformats.org/drawingml/2006/main">
-              <a:ext uri="{FF2B5EF4-FFF2-40B4-BE49-F238E27FC236}">
-                <a16:creationId xmlns:a16="http://schemas.microsoft.com/office/drawing/2014/main" id="{3E194687-D7B7-45F6-84EB-D548F3A7975B}"/>
-              </a:ext>
-            </a:extLst>
-          </p:cNvPr>
-          <p:cNvSpPr>
-            <a:spLocks xmlns:a="http://schemas.openxmlformats.org/drawingml/2006/main" noGrp="1"/>
-          </p:cNvSpPr>
-          <p:nvPr/>
-        </p:nvSpPr>
-        <p:spPr>
-          <a:xfrm xmlns:a="http://schemas.openxmlformats.org/drawingml/2006/main">
-            <a:off x="1333500" y="3448050"/>
-            <a:ext cx="4057650" cy="476250"/>
-          </a:xfrm>
-          <a:prstGeom xmlns:a="http://schemas.openxmlformats.org/drawingml/2006/main" prst="rect">
-            <a:avLst/>
+          <p:cNvPr id="13" name="summary-12-heading-2">
+            <a:extLst xmlns:a="http://schemas.openxmlformats.org/drawingml/2006/main">
+              <a:ext uri="{FF2B5EF4-FFF2-40B4-BE49-F238E27FC236}">
+                <a16:creationId xmlns:a16="http://schemas.microsoft.com/office/drawing/2014/main" id="{C974AAFF-E126-43E0-AE84-D4284113842B}"/>
+              </a:ext>
+            </a:extLst>
+          </p:cNvPr>
+          <p:cNvSpPr>
+            <a:spLocks xmlns:a="http://schemas.openxmlformats.org/drawingml/2006/main" noGrp="1"/>
+          </p:cNvSpPr>
+          <p:nvPr/>
+        </p:nvSpPr>
+        <p:spPr>
+          <a:xfrm xmlns:a="http://schemas.openxmlformats.org/drawingml/2006/main">
+            <a:off x="6858000" y="1162050"/>
+            <a:ext cx="2152650" cy="590550"/>
+          </a:xfrm>
+          <a:prstGeom xmlns:a="http://schemas.openxmlformats.org/drawingml/2006/main" prst="roundRect">
+            <a:avLst>
+              <a:gd name="adj" fmla="val 12903"/>
+            </a:avLst>
           </a:prstGeom>
           <a:solidFill xmlns:a="http://schemas.openxmlformats.org/drawingml/2006/main">
             <a:srgbClr val="F8E9EA"/>
@@ -13486,52 +13693,62 @@
           <a:bodyPr xmlns:a="http://schemas.openxmlformats.org/drawingml/2006/main" lIns="76200" tIns="38100" rIns="76200" bIns="38100" anchor="ctr"/>
           <a:lstStyle xmlns:a="http://schemas.openxmlformats.org/drawingml/2006/main"/>
           <a:p xmlns:a="http://schemas.openxmlformats.org/drawingml/2006/main">
-            <a:pPr algn="l">
-              <a:defRPr sz="1575" b="1">
-                <a:solidFill>
-                  <a:srgbClr val="263746"/>
-                </a:solidFill>
-              </a:defRPr>
-            </a:pPr>
-            <a:r>
-              <a:rPr sz="1575" b="1">
-                <a:solidFill>
-                  <a:srgbClr val="263746"/>
+            <a:pPr algn="ctr">
+              <a:lnSpc>
+                <a:spcPct val="112000"/>
+              </a:lnSpc>
+              <a:buNone/>
+              <a:defRPr sz="1725" b="1">
+                <a:solidFill>
+                  <a:srgbClr val="C8161E"/>
+                </a:solidFill>
+              </a:defRPr>
+            </a:pPr>
+            <a:r>
+              <a:rPr sz="1725" b="1">
+                <a:solidFill>
+                  <a:srgbClr val="C8161E"/>
                 </a:solidFill>
                 <a:latin typeface="Microsoft YaHei"/>
                 <a:ea typeface="Microsoft YaHei"/>
                 <a:cs typeface="Microsoft YaHei"/>
               </a:rPr>
-              <a:t>第 13 课先验证哪一步？</a:t>
-            </a:r>
-          </a:p>
-        </p:txBody>
-      </p:sp>
-      <p:sp>
-        <p:nvSpPr>
-          <p:cNvPr id="13" name="p20-arrow">
-            <a:extLst xmlns:a="http://schemas.openxmlformats.org/drawingml/2006/main">
-              <a:ext uri="{FF2B5EF4-FFF2-40B4-BE49-F238E27FC236}">
-                <a16:creationId xmlns:a16="http://schemas.microsoft.com/office/drawing/2014/main" id="{9AF1FFE2-5E5B-44B1-9EBF-1ECDAD0BC09B}"/>
-              </a:ext>
-            </a:extLst>
-          </p:cNvPr>
-          <p:cNvSpPr>
-            <a:spLocks xmlns:a="http://schemas.openxmlformats.org/drawingml/2006/main" noGrp="1"/>
-          </p:cNvSpPr>
-          <p:nvPr/>
-        </p:nvSpPr>
-        <p:spPr>
-          <a:xfrm xmlns:a="http://schemas.openxmlformats.org/drawingml/2006/main">
-            <a:off x="5695950" y="2571750"/>
-            <a:ext cx="781050" cy="685800"/>
-          </a:xfrm>
-          <a:prstGeom xmlns:a="http://schemas.openxmlformats.org/drawingml/2006/main" prst="rect">
-            <a:avLst/>
-          </a:prstGeom>
-          <a:noFill xmlns:a="http://schemas.openxmlformats.org/drawingml/2006/main"/>
-          <a:ln xmlns:a="http://schemas.openxmlformats.org/drawingml/2006/main" w="0">
-            <a:noFill/>
+              <a:t>独立 Evals</a:t>
+            </a:r>
+          </a:p>
+        </p:txBody>
+      </p:sp>
+      <p:sp>
+        <p:nvSpPr>
+          <p:cNvPr id="14" name="summary-12-detail-2">
+            <a:extLst xmlns:a="http://schemas.openxmlformats.org/drawingml/2006/main">
+              <a:ext uri="{FF2B5EF4-FFF2-40B4-BE49-F238E27FC236}">
+                <a16:creationId xmlns:a16="http://schemas.microsoft.com/office/drawing/2014/main" id="{C11B0548-7190-4252-B380-EC2C0059DD4C}"/>
+              </a:ext>
+            </a:extLst>
+          </p:cNvPr>
+          <p:cNvSpPr>
+            <a:spLocks xmlns:a="http://schemas.openxmlformats.org/drawingml/2006/main" noGrp="1"/>
+          </p:cNvSpPr>
+          <p:nvPr/>
+        </p:nvSpPr>
+        <p:spPr>
+          <a:xfrm xmlns:a="http://schemas.openxmlformats.org/drawingml/2006/main">
+            <a:off x="6286500" y="2095500"/>
+            <a:ext cx="2724150" cy="1676400"/>
+          </a:xfrm>
+          <a:prstGeom xmlns:a="http://schemas.openxmlformats.org/drawingml/2006/main" prst="roundRect">
+            <a:avLst>
+              <a:gd name="adj" fmla="val 4545"/>
+            </a:avLst>
+          </a:prstGeom>
+          <a:solidFill xmlns:a="http://schemas.openxmlformats.org/drawingml/2006/main">
+            <a:srgbClr val="FFFFFF"/>
+          </a:solidFill>
+          <a:ln xmlns:a="http://schemas.openxmlformats.org/drawingml/2006/main" w="9525">
+            <a:solidFill>
+              <a:srgbClr val="D6DDE2"/>
+            </a:solidFill>
             <a:prstDash val="solid"/>
           </a:ln>
         </p:spPr>
@@ -13540,21 +13757,815 @@
           <a:lstStyle xmlns:a="http://schemas.openxmlformats.org/drawingml/2006/main"/>
           <a:p xmlns:a="http://schemas.openxmlformats.org/drawingml/2006/main">
             <a:pPr algn="ctr">
-              <a:defRPr sz="3000" b="1">
-                <a:solidFill>
-                  <a:srgbClr val="C8161E"/>
-                </a:solidFill>
-              </a:defRPr>
-            </a:pPr>
-            <a:r>
-              <a:rPr sz="3000" b="1">
-                <a:solidFill>
-                  <a:srgbClr val="C8161E"/>
+              <a:lnSpc>
+                <a:spcPct val="116000"/>
+              </a:lnSpc>
+              <a:buNone/>
+              <a:defRPr sz="1500" b="1">
+                <a:solidFill>
+                  <a:srgbClr val="263746"/>
+                </a:solidFill>
+              </a:defRPr>
+            </a:pPr>
+            <a:r>
+              <a:rPr sz="1500" b="1">
+                <a:solidFill>
+                  <a:srgbClr val="263746"/>
                 </a:solidFill>
                 <a:latin typeface="Microsoft YaHei"/>
                 <a:ea typeface="Microsoft YaHei"/>
                 <a:cs typeface="Microsoft YaHei"/>
               </a:rPr>
+              <a:t>baseline、指标、对照与人工审核独立于执行器</a:t>
+            </a:r>
+          </a:p>
+        </p:txBody>
+      </p:sp>
+      <p:sp>
+        <p:nvSpPr>
+          <p:cNvPr id="15" name="summary-12-number-3">
+            <a:extLst xmlns:a="http://schemas.openxmlformats.org/drawingml/2006/main">
+              <a:ext uri="{FF2B5EF4-FFF2-40B4-BE49-F238E27FC236}">
+                <a16:creationId xmlns:a16="http://schemas.microsoft.com/office/drawing/2014/main" id="{156218B8-F229-473F-8EC5-E7A1A2853F63}"/>
+              </a:ext>
+            </a:extLst>
+          </p:cNvPr>
+          <p:cNvSpPr>
+            <a:spLocks xmlns:a="http://schemas.openxmlformats.org/drawingml/2006/main" noGrp="1"/>
+          </p:cNvSpPr>
+          <p:nvPr/>
+        </p:nvSpPr>
+        <p:spPr>
+          <a:xfrm xmlns:a="http://schemas.openxmlformats.org/drawingml/2006/main">
+            <a:off x="9201150" y="1219200"/>
+            <a:ext cx="476250" cy="476250"/>
+          </a:xfrm>
+          <a:prstGeom xmlns:a="http://schemas.openxmlformats.org/drawingml/2006/main" prst="roundRect">
+            <a:avLst>
+              <a:gd name="adj" fmla="val 16000"/>
+            </a:avLst>
+          </a:prstGeom>
+          <a:solidFill xmlns:a="http://schemas.openxmlformats.org/drawingml/2006/main">
+            <a:srgbClr val="A86C12"/>
+          </a:solidFill>
+          <a:ln xmlns:a="http://schemas.openxmlformats.org/drawingml/2006/main" w="0">
+            <a:noFill/>
+            <a:prstDash val="solid"/>
+          </a:ln>
+        </p:spPr>
+        <p:txBody>
+          <a:bodyPr xmlns:a="http://schemas.openxmlformats.org/drawingml/2006/main" lIns="76200" tIns="38100" rIns="76200" bIns="38100" anchor="ctr"/>
+          <a:lstStyle xmlns:a="http://schemas.openxmlformats.org/drawingml/2006/main"/>
+          <a:p xmlns:a="http://schemas.openxmlformats.org/drawingml/2006/main">
+            <a:pPr algn="ctr">
+              <a:lnSpc>
+                <a:spcPct val="112000"/>
+              </a:lnSpc>
+              <a:buNone/>
+              <a:defRPr sz="1500" b="1">
+                <a:solidFill>
+                  <a:srgbClr val="FFFFFF"/>
+                </a:solidFill>
+              </a:defRPr>
+            </a:pPr>
+            <a:r>
+              <a:rPr sz="1500" b="1">
+                <a:solidFill>
+                  <a:srgbClr val="FFFFFF"/>
+                </a:solidFill>
+                <a:latin typeface="Arial"/>
+                <a:ea typeface="Arial"/>
+                <a:cs typeface="Arial"/>
+              </a:rPr>
+              <a:t>4</a:t>
+            </a:r>
+          </a:p>
+        </p:txBody>
+      </p:sp>
+      <p:sp>
+        <p:nvSpPr>
+          <p:cNvPr id="16" name="summary-12-heading-3">
+            <a:extLst xmlns:a="http://schemas.openxmlformats.org/drawingml/2006/main">
+              <a:ext uri="{FF2B5EF4-FFF2-40B4-BE49-F238E27FC236}">
+                <a16:creationId xmlns:a16="http://schemas.microsoft.com/office/drawing/2014/main" id="{21A76C02-98D8-43E0-884F-5E60FC94F931}"/>
+              </a:ext>
+            </a:extLst>
+          </p:cNvPr>
+          <p:cNvSpPr>
+            <a:spLocks xmlns:a="http://schemas.openxmlformats.org/drawingml/2006/main" noGrp="1"/>
+          </p:cNvSpPr>
+          <p:nvPr/>
+        </p:nvSpPr>
+        <p:spPr>
+          <a:xfrm xmlns:a="http://schemas.openxmlformats.org/drawingml/2006/main">
+            <a:off x="9772650" y="1162050"/>
+            <a:ext cx="2152650" cy="590550"/>
+          </a:xfrm>
+          <a:prstGeom xmlns:a="http://schemas.openxmlformats.org/drawingml/2006/main" prst="roundRect">
+            <a:avLst>
+              <a:gd name="adj" fmla="val 12903"/>
+            </a:avLst>
+          </a:prstGeom>
+          <a:solidFill xmlns:a="http://schemas.openxmlformats.org/drawingml/2006/main">
+            <a:srgbClr val="FAF0DD"/>
+          </a:solidFill>
+          <a:ln xmlns:a="http://schemas.openxmlformats.org/drawingml/2006/main" w="0">
+            <a:noFill/>
+            <a:prstDash val="solid"/>
+          </a:ln>
+        </p:spPr>
+        <p:txBody>
+          <a:bodyPr xmlns:a="http://schemas.openxmlformats.org/drawingml/2006/main" lIns="76200" tIns="38100" rIns="76200" bIns="38100" anchor="ctr"/>
+          <a:lstStyle xmlns:a="http://schemas.openxmlformats.org/drawingml/2006/main"/>
+          <a:p xmlns:a="http://schemas.openxmlformats.org/drawingml/2006/main">
+            <a:pPr algn="ctr">
+              <a:lnSpc>
+                <a:spcPct val="112000"/>
+              </a:lnSpc>
+              <a:buNone/>
+              <a:defRPr sz="1725" b="1">
+                <a:solidFill>
+                  <a:srgbClr val="A86C12"/>
+                </a:solidFill>
+              </a:defRPr>
+            </a:pPr>
+            <a:r>
+              <a:rPr sz="1725" b="1">
+                <a:solidFill>
+                  <a:srgbClr val="A86C12"/>
+                </a:solidFill>
+                <a:latin typeface="Microsoft YaHei"/>
+                <a:ea typeface="Microsoft YaHei"/>
+                <a:cs typeface="Microsoft YaHei"/>
+              </a:rPr>
+              <a:t>失败恢复</a:t>
+            </a:r>
+          </a:p>
+        </p:txBody>
+      </p:sp>
+      <p:sp>
+        <p:nvSpPr>
+          <p:cNvPr id="17" name="summary-12-detail-3">
+            <a:extLst xmlns:a="http://schemas.openxmlformats.org/drawingml/2006/main">
+              <a:ext uri="{FF2B5EF4-FFF2-40B4-BE49-F238E27FC236}">
+                <a16:creationId xmlns:a16="http://schemas.microsoft.com/office/drawing/2014/main" id="{BEEEDC8A-328A-4C28-A543-04B9066DE454}"/>
+              </a:ext>
+            </a:extLst>
+          </p:cNvPr>
+          <p:cNvSpPr>
+            <a:spLocks xmlns:a="http://schemas.openxmlformats.org/drawingml/2006/main" noGrp="1"/>
+          </p:cNvSpPr>
+          <p:nvPr/>
+        </p:nvSpPr>
+        <p:spPr>
+          <a:xfrm xmlns:a="http://schemas.openxmlformats.org/drawingml/2006/main">
+            <a:off x="9201150" y="2095500"/>
+            <a:ext cx="2724150" cy="1676400"/>
+          </a:xfrm>
+          <a:prstGeom xmlns:a="http://schemas.openxmlformats.org/drawingml/2006/main" prst="roundRect">
+            <a:avLst>
+              <a:gd name="adj" fmla="val 4545"/>
+            </a:avLst>
+          </a:prstGeom>
+          <a:solidFill xmlns:a="http://schemas.openxmlformats.org/drawingml/2006/main">
+            <a:srgbClr val="FFFFFF"/>
+          </a:solidFill>
+          <a:ln xmlns:a="http://schemas.openxmlformats.org/drawingml/2006/main" w="9525">
+            <a:solidFill>
+              <a:srgbClr val="D6DDE2"/>
+            </a:solidFill>
+            <a:prstDash val="solid"/>
+          </a:ln>
+        </p:spPr>
+        <p:txBody>
+          <a:bodyPr xmlns:a="http://schemas.openxmlformats.org/drawingml/2006/main" lIns="76200" tIns="38100" rIns="76200" bIns="38100" anchor="ctr"/>
+          <a:lstStyle xmlns:a="http://schemas.openxmlformats.org/drawingml/2006/main"/>
+          <a:p xmlns:a="http://schemas.openxmlformats.org/drawingml/2006/main">
+            <a:pPr algn="ctr">
+              <a:lnSpc>
+                <a:spcPct val="116000"/>
+              </a:lnSpc>
+              <a:buNone/>
+              <a:defRPr sz="1500" b="1">
+                <a:solidFill>
+                  <a:srgbClr val="263746"/>
+                </a:solidFill>
+              </a:defRPr>
+            </a:pPr>
+            <a:r>
+              <a:rPr sz="1500" b="1">
+                <a:solidFill>
+                  <a:srgbClr val="263746"/>
+                </a:solidFill>
+                <a:latin typeface="Microsoft YaHei"/>
+                <a:ea typeface="Microsoft YaHei"/>
+                <a:cs typeface="Microsoft YaHei"/>
+              </a:rPr>
+              <a:t>保留 trace、回退到稳定状态，并记录恢复后的核验</a:t>
+            </a:r>
+          </a:p>
+        </p:txBody>
+      </p:sp>
+      <p:sp>
+        <p:nvSpPr>
+          <p:cNvPr id="18" name="summary-12-boundary">
+            <a:extLst xmlns:a="http://schemas.openxmlformats.org/drawingml/2006/main">
+              <a:ext uri="{FF2B5EF4-FFF2-40B4-BE49-F238E27FC236}">
+                <a16:creationId xmlns:a16="http://schemas.microsoft.com/office/drawing/2014/main" id="{AA9F3F7E-9F93-41AB-9990-656D9230CD56}"/>
+              </a:ext>
+            </a:extLst>
+          </p:cNvPr>
+          <p:cNvSpPr>
+            <a:spLocks xmlns:a="http://schemas.openxmlformats.org/drawingml/2006/main" noGrp="1"/>
+          </p:cNvSpPr>
+          <p:nvPr/>
+        </p:nvSpPr>
+        <p:spPr>
+          <a:xfrm xmlns:a="http://schemas.openxmlformats.org/drawingml/2006/main">
+            <a:off x="1162050" y="4400550"/>
+            <a:ext cx="9867900" cy="876300"/>
+          </a:xfrm>
+          <a:prstGeom xmlns:a="http://schemas.openxmlformats.org/drawingml/2006/main" prst="roundRect">
+            <a:avLst>
+              <a:gd name="adj" fmla="val 8696"/>
+            </a:avLst>
+          </a:prstGeom>
+          <a:solidFill xmlns:a="http://schemas.openxmlformats.org/drawingml/2006/main">
+            <a:srgbClr val="F8E9EA"/>
+          </a:solidFill>
+          <a:ln xmlns:a="http://schemas.openxmlformats.org/drawingml/2006/main" w="0">
+            <a:noFill/>
+            <a:prstDash val="solid"/>
+          </a:ln>
+        </p:spPr>
+        <p:txBody>
+          <a:bodyPr xmlns:a="http://schemas.openxmlformats.org/drawingml/2006/main" lIns="76200" tIns="38100" rIns="76200" bIns="38100" anchor="ctr"/>
+          <a:lstStyle xmlns:a="http://schemas.openxmlformats.org/drawingml/2006/main"/>
+          <a:p xmlns:a="http://schemas.openxmlformats.org/drawingml/2006/main">
+            <a:pPr algn="ctr">
+              <a:lnSpc>
+                <a:spcPct val="114000"/>
+              </a:lnSpc>
+              <a:buNone/>
+              <a:defRPr sz="1725" b="1">
+                <a:solidFill>
+                  <a:srgbClr val="C8161E"/>
+                </a:solidFill>
+              </a:defRPr>
+            </a:pPr>
+            <a:r>
+              <a:rPr sz="1725" b="1">
+                <a:solidFill>
+                  <a:srgbClr val="C8161E"/>
+                </a:solidFill>
+                <a:latin typeface="Microsoft YaHei"/>
+                <a:ea typeface="Microsoft YaHei"/>
+                <a:cs typeface="Microsoft YaHei"/>
+              </a:rPr>
+              <a:t>关键边界：工作流设计只证明路径可运行或可演示，不能替代实际评价，也不能自动决定研究价值。</a:t>
+            </a:r>
+          </a:p>
+        </p:txBody>
+      </p:sp>
+    </p:spTree>
+    <p:extLst>
+      <p:ext uri="{BB962C8B-B14F-4D97-AF65-F5344CB8AC3E}">
+        <p14:creationId xmlns:p14="http://schemas.microsoft.com/office/powerpoint/2010/main" val="1443728403"/>
+      </p:ext>
+    </p:extLst>
+  </p:cSld>
+</p:sld>
+</file>
+
+<file path=ppt/slides/slide21.xml><?xml version="1.0" encoding="utf-8"?>
+<p:sld xmlns:p="http://schemas.openxmlformats.org/presentationml/2006/main">
+  <p:cSld>
+    <p:spTree>
+      <p:nvGrpSpPr>
+        <p:cNvPr id="1" name=""/>
+        <p:cNvGrpSpPr/>
+        <p:nvPr/>
+      </p:nvGrpSpPr>
+      <p:grpSpPr>
+        <a:xfrm xmlns:a="http://schemas.openxmlformats.org/drawingml/2006/main"/>
+      </p:grpSpPr>
+      <p:sp>
+        <p:nvSpPr>
+          <p:cNvPr id="4" name="Text Placeholder 3">
+            <a:extLst xmlns:a="http://schemas.openxmlformats.org/drawingml/2006/main">
+              <a:ext uri="{FF2B5EF4-FFF2-40B4-BE49-F238E27FC236}">
+                <a16:creationId xmlns:a16="http://schemas.microsoft.com/office/drawing/2014/main" id="{4D941B40-7A0A-534E-3563-CA11753C8E3F}"/>
+              </a:ext>
+            </a:extLst>
+          </p:cNvPr>
+          <p:cNvSpPr>
+            <a:spLocks xmlns:a="http://schemas.openxmlformats.org/drawingml/2006/main" noGrp="1"/>
+          </p:cNvSpPr>
+          <p:nvPr>
+            <p:ph type="body" idx="14"/>
+          </p:nvPr>
+        </p:nvSpPr>
+        <p:spPr>
+          <a:xfrm xmlns:a="http://schemas.openxmlformats.org/drawingml/2006/main">
+            <a:off x="1028700" y="28575"/>
+            <a:ext cx="10668000" cy="628650"/>
+          </a:xfrm>
+        </p:spPr>
+        <p:txBody>
+          <a:bodyPr xmlns:a="http://schemas.openxmlformats.org/drawingml/2006/main" lIns="76200" tIns="0" rIns="76200" bIns="0" anchor="ctr"/>
+          <a:lstStyle xmlns:a="http://schemas.openxmlformats.org/drawingml/2006/main"/>
+          <a:p xmlns:a="http://schemas.openxmlformats.org/drawingml/2006/main">
+            <a:pPr algn="l">
+              <a:buNone/>
+            </a:pPr>
+            <a:r>
+              <a:rPr sz="2175" b="1">
+                <a:solidFill>
+                  <a:srgbClr val="FFFFFF"/>
+                </a:solidFill>
+                <a:latin typeface="Microsoft YaHei"/>
+                <a:ea typeface="Microsoft YaHei"/>
+                <a:cs typeface="Microsoft YaHei"/>
+              </a:rPr>
+              <a:t>退出卡：把设计带到第 13 课实际验证</a:t>
+            </a:r>
+            <a:endParaRPr/>
+          </a:p>
+        </p:txBody>
+      </p:sp>
+      <p:sp>
+        <p:nvSpPr>
+          <p:cNvPr id="5" name="Slide Number Placeholder 4">
+            <a:extLst xmlns:a="http://schemas.openxmlformats.org/drawingml/2006/main">
+              <a:ext uri="{FF2B5EF4-FFF2-40B4-BE49-F238E27FC236}">
+                <a16:creationId xmlns:a16="http://schemas.microsoft.com/office/drawing/2014/main" id="{EBA5909F-738E-F60C-BE8C-B3F1D94548E5}"/>
+              </a:ext>
+            </a:extLst>
+          </p:cNvPr>
+          <p:cNvSpPr>
+            <a:spLocks xmlns:a="http://schemas.openxmlformats.org/drawingml/2006/main" noGrp="1"/>
+          </p:cNvSpPr>
+          <p:nvPr>
+            <p:ph type="sldNum" idx="10"/>
+          </p:nvPr>
+        </p:nvSpPr>
+        <p:spPr/>
+        <p:txBody>
+          <a:bodyPr xmlns:a="http://schemas.openxmlformats.org/drawingml/2006/main"/>
+          <a:lstStyle xmlns:a="http://schemas.openxmlformats.org/drawingml/2006/main"/>
+          <a:p xmlns:a="http://schemas.openxmlformats.org/drawingml/2006/main">
+            <a:fld id="{F6DF2BE2-2DFA-1C03-677D-BDC2260D6D92}" type="slidenum">
+              <a:t>21</a:t>
+            </a:fld>
+            <a:endParaRPr/>
+          </a:p>
+        </p:txBody>
+      </p:sp>
+      <p:sp>
+        <p:nvSpPr>
+          <p:cNvPr id="6" name="p20-left-title">
+            <a:extLst xmlns:a="http://schemas.openxmlformats.org/drawingml/2006/main">
+              <a:ext uri="{FF2B5EF4-FFF2-40B4-BE49-F238E27FC236}">
+                <a16:creationId xmlns:a16="http://schemas.microsoft.com/office/drawing/2014/main" id="{94A62A7F-F181-44A1-93DF-CF6643549B28}"/>
+              </a:ext>
+            </a:extLst>
+          </p:cNvPr>
+          <p:cNvSpPr>
+            <a:spLocks xmlns:a="http://schemas.openxmlformats.org/drawingml/2006/main" noGrp="1"/>
+          </p:cNvSpPr>
+          <p:nvPr/>
+        </p:nvSpPr>
+        <p:spPr>
+          <a:xfrm xmlns:a="http://schemas.openxmlformats.org/drawingml/2006/main">
+            <a:off x="609600" y="1009650"/>
+            <a:ext cx="4914900" cy="495300"/>
+          </a:xfrm>
+          <a:prstGeom xmlns:a="http://schemas.openxmlformats.org/drawingml/2006/main" prst="rect">
+            <a:avLst/>
+          </a:prstGeom>
+          <a:noFill xmlns:a="http://schemas.openxmlformats.org/drawingml/2006/main"/>
+          <a:ln xmlns:a="http://schemas.openxmlformats.org/drawingml/2006/main" w="0">
+            <a:noFill/>
+            <a:prstDash val="solid"/>
+          </a:ln>
+        </p:spPr>
+        <p:txBody>
+          <a:bodyPr xmlns:a="http://schemas.openxmlformats.org/drawingml/2006/main" lIns="76200" tIns="38100" rIns="76200" bIns="38100" anchor="ctr"/>
+          <a:lstStyle xmlns:a="http://schemas.openxmlformats.org/drawingml/2006/main"/>
+          <a:p xmlns:a="http://schemas.openxmlformats.org/drawingml/2006/main">
+            <a:pPr algn="ctr">
+              <a:buNone/>
+              <a:defRPr sz="1950" b="1">
+                <a:solidFill>
+                  <a:srgbClr val="18354E"/>
+                </a:solidFill>
+              </a:defRPr>
+            </a:pPr>
+            <a:r>
+              <a:rPr sz="1950" b="1">
+                <a:solidFill>
+                  <a:srgbClr val="18354E"/>
+                </a:solidFill>
+                <a:latin typeface="Microsoft YaHei"/>
+                <a:ea typeface="Microsoft YaHei"/>
+                <a:cs typeface="Microsoft YaHei"/>
+              </a:rPr>
+              <a:t>退出卡｜现在能回答</a:t>
+            </a:r>
+          </a:p>
+        </p:txBody>
+      </p:sp>
+      <p:sp>
+        <p:nvSpPr>
+          <p:cNvPr id="7" name="p20-n0">
+            <a:extLst xmlns:a="http://schemas.openxmlformats.org/drawingml/2006/main">
+              <a:ext uri="{FF2B5EF4-FFF2-40B4-BE49-F238E27FC236}">
+                <a16:creationId xmlns:a16="http://schemas.microsoft.com/office/drawing/2014/main" id="{A241A69B-97FA-468F-ADB3-F1F5008A5F17}"/>
+              </a:ext>
+            </a:extLst>
+          </p:cNvPr>
+          <p:cNvSpPr>
+            <a:spLocks xmlns:a="http://schemas.openxmlformats.org/drawingml/2006/main" noGrp="1"/>
+          </p:cNvSpPr>
+          <p:nvPr/>
+        </p:nvSpPr>
+        <p:spPr>
+          <a:xfrm xmlns:a="http://schemas.openxmlformats.org/drawingml/2006/main">
+            <a:off x="685800" y="1733550"/>
+            <a:ext cx="476250" cy="476250"/>
+          </a:xfrm>
+          <a:prstGeom xmlns:a="http://schemas.openxmlformats.org/drawingml/2006/main" prst="roundRect">
+            <a:avLst>
+              <a:gd name="adj" fmla="val 16000"/>
+            </a:avLst>
+          </a:prstGeom>
+          <a:solidFill xmlns:a="http://schemas.openxmlformats.org/drawingml/2006/main">
+            <a:srgbClr val="18354E"/>
+          </a:solidFill>
+          <a:ln xmlns:a="http://schemas.openxmlformats.org/drawingml/2006/main" w="0">
+            <a:noFill/>
+            <a:prstDash val="solid"/>
+          </a:ln>
+        </p:spPr>
+        <p:txBody>
+          <a:bodyPr xmlns:a="http://schemas.openxmlformats.org/drawingml/2006/main" lIns="76200" tIns="38100" rIns="76200" bIns="38100" anchor="ctr"/>
+          <a:lstStyle xmlns:a="http://schemas.openxmlformats.org/drawingml/2006/main"/>
+          <a:p xmlns:a="http://schemas.openxmlformats.org/drawingml/2006/main">
+            <a:pPr algn="ctr">
+              <a:buNone/>
+              <a:defRPr sz="1350" b="1">
+                <a:solidFill>
+                  <a:srgbClr val="FFFFFF"/>
+                </a:solidFill>
+              </a:defRPr>
+            </a:pPr>
+            <a:r>
+              <a:rPr sz="1350" b="1">
+                <a:solidFill>
+                  <a:srgbClr val="FFFFFF"/>
+                </a:solidFill>
+                <a:latin typeface="Arial"/>
+                <a:ea typeface="Arial"/>
+                <a:cs typeface="Arial"/>
+              </a:rPr>
+              <a:t>1</a:t>
+            </a:r>
+          </a:p>
+        </p:txBody>
+      </p:sp>
+      <p:sp>
+        <p:nvSpPr>
+          <p:cNvPr id="8" name="p20-t0">
+            <a:extLst xmlns:a="http://schemas.openxmlformats.org/drawingml/2006/main">
+              <a:ext uri="{FF2B5EF4-FFF2-40B4-BE49-F238E27FC236}">
+                <a16:creationId xmlns:a16="http://schemas.microsoft.com/office/drawing/2014/main" id="{2D5F7C62-FA88-4D0A-A366-F53A39C44B99}"/>
+              </a:ext>
+            </a:extLst>
+          </p:cNvPr>
+          <p:cNvSpPr>
+            <a:spLocks xmlns:a="http://schemas.openxmlformats.org/drawingml/2006/main" noGrp="1"/>
+          </p:cNvSpPr>
+          <p:nvPr/>
+        </p:nvSpPr>
+        <p:spPr>
+          <a:xfrm xmlns:a="http://schemas.openxmlformats.org/drawingml/2006/main">
+            <a:off x="1333500" y="1733550"/>
+            <a:ext cx="4057650" cy="476250"/>
+          </a:xfrm>
+          <a:prstGeom xmlns:a="http://schemas.openxmlformats.org/drawingml/2006/main" prst="rect">
+            <a:avLst/>
+          </a:prstGeom>
+          <a:solidFill xmlns:a="http://schemas.openxmlformats.org/drawingml/2006/main">
+            <a:srgbClr val="F3F6F7"/>
+          </a:solidFill>
+          <a:ln xmlns:a="http://schemas.openxmlformats.org/drawingml/2006/main" w="0">
+            <a:noFill/>
+            <a:prstDash val="solid"/>
+          </a:ln>
+        </p:spPr>
+        <p:txBody>
+          <a:bodyPr xmlns:a="http://schemas.openxmlformats.org/drawingml/2006/main" lIns="76200" tIns="38100" rIns="76200" bIns="38100" anchor="ctr"/>
+          <a:lstStyle xmlns:a="http://schemas.openxmlformats.org/drawingml/2006/main"/>
+          <a:p xmlns:a="http://schemas.openxmlformats.org/drawingml/2006/main">
+            <a:pPr algn="l">
+              <a:buNone/>
+              <a:defRPr sz="1575" b="1">
+                <a:solidFill>
+                  <a:srgbClr val="263746"/>
+                </a:solidFill>
+              </a:defRPr>
+            </a:pPr>
+            <a:r>
+              <a:rPr sz="1575" b="1">
+                <a:solidFill>
+                  <a:srgbClr val="263746"/>
+                </a:solidFill>
+                <a:latin typeface="Microsoft YaHei"/>
+                <a:ea typeface="Microsoft YaHei"/>
+                <a:cs typeface="Microsoft YaHei"/>
+              </a:rPr>
+              <a:t>我的工作流最危险的权限是？</a:t>
+            </a:r>
+          </a:p>
+        </p:txBody>
+      </p:sp>
+      <p:sp>
+        <p:nvSpPr>
+          <p:cNvPr id="9" name="p20-n1">
+            <a:extLst xmlns:a="http://schemas.openxmlformats.org/drawingml/2006/main">
+              <a:ext uri="{FF2B5EF4-FFF2-40B4-BE49-F238E27FC236}">
+                <a16:creationId xmlns:a16="http://schemas.microsoft.com/office/drawing/2014/main" id="{6B130874-DC53-4F64-90AE-A0C3AFECB468}"/>
+              </a:ext>
+            </a:extLst>
+          </p:cNvPr>
+          <p:cNvSpPr>
+            <a:spLocks xmlns:a="http://schemas.openxmlformats.org/drawingml/2006/main" noGrp="1"/>
+          </p:cNvSpPr>
+          <p:nvPr/>
+        </p:nvSpPr>
+        <p:spPr>
+          <a:xfrm xmlns:a="http://schemas.openxmlformats.org/drawingml/2006/main">
+            <a:off x="685800" y="2590800"/>
+            <a:ext cx="476250" cy="476250"/>
+          </a:xfrm>
+          <a:prstGeom xmlns:a="http://schemas.openxmlformats.org/drawingml/2006/main" prst="roundRect">
+            <a:avLst>
+              <a:gd name="adj" fmla="val 16000"/>
+            </a:avLst>
+          </a:prstGeom>
+          <a:solidFill xmlns:a="http://schemas.openxmlformats.org/drawingml/2006/main">
+            <a:srgbClr val="18354E"/>
+          </a:solidFill>
+          <a:ln xmlns:a="http://schemas.openxmlformats.org/drawingml/2006/main" w="0">
+            <a:noFill/>
+            <a:prstDash val="solid"/>
+          </a:ln>
+        </p:spPr>
+        <p:txBody>
+          <a:bodyPr xmlns:a="http://schemas.openxmlformats.org/drawingml/2006/main" lIns="76200" tIns="38100" rIns="76200" bIns="38100" anchor="ctr"/>
+          <a:lstStyle xmlns:a="http://schemas.openxmlformats.org/drawingml/2006/main"/>
+          <a:p xmlns:a="http://schemas.openxmlformats.org/drawingml/2006/main">
+            <a:pPr algn="ctr">
+              <a:buNone/>
+              <a:defRPr sz="1350" b="1">
+                <a:solidFill>
+                  <a:srgbClr val="FFFFFF"/>
+                </a:solidFill>
+              </a:defRPr>
+            </a:pPr>
+            <a:r>
+              <a:rPr sz="1350" b="1">
+                <a:solidFill>
+                  <a:srgbClr val="FFFFFF"/>
+                </a:solidFill>
+                <a:latin typeface="Arial"/>
+                <a:ea typeface="Arial"/>
+                <a:cs typeface="Arial"/>
+              </a:rPr>
+              <a:t>2</a:t>
+            </a:r>
+          </a:p>
+        </p:txBody>
+      </p:sp>
+      <p:sp>
+        <p:nvSpPr>
+          <p:cNvPr id="10" name="p20-t1">
+            <a:extLst xmlns:a="http://schemas.openxmlformats.org/drawingml/2006/main">
+              <a:ext uri="{FF2B5EF4-FFF2-40B4-BE49-F238E27FC236}">
+                <a16:creationId xmlns:a16="http://schemas.microsoft.com/office/drawing/2014/main" id="{836415F6-9793-4FA0-9BF2-F9721554335B}"/>
+              </a:ext>
+            </a:extLst>
+          </p:cNvPr>
+          <p:cNvSpPr>
+            <a:spLocks xmlns:a="http://schemas.openxmlformats.org/drawingml/2006/main" noGrp="1"/>
+          </p:cNvSpPr>
+          <p:nvPr/>
+        </p:nvSpPr>
+        <p:spPr>
+          <a:xfrm xmlns:a="http://schemas.openxmlformats.org/drawingml/2006/main">
+            <a:off x="1333500" y="2590800"/>
+            <a:ext cx="4057650" cy="476250"/>
+          </a:xfrm>
+          <a:prstGeom xmlns:a="http://schemas.openxmlformats.org/drawingml/2006/main" prst="rect">
+            <a:avLst/>
+          </a:prstGeom>
+          <a:solidFill xmlns:a="http://schemas.openxmlformats.org/drawingml/2006/main">
+            <a:srgbClr val="F3F6F7"/>
+          </a:solidFill>
+          <a:ln xmlns:a="http://schemas.openxmlformats.org/drawingml/2006/main" w="0">
+            <a:noFill/>
+            <a:prstDash val="solid"/>
+          </a:ln>
+        </p:spPr>
+        <p:txBody>
+          <a:bodyPr xmlns:a="http://schemas.openxmlformats.org/drawingml/2006/main" lIns="76200" tIns="38100" rIns="76200" bIns="38100" anchor="ctr"/>
+          <a:lstStyle xmlns:a="http://schemas.openxmlformats.org/drawingml/2006/main"/>
+          <a:p xmlns:a="http://schemas.openxmlformats.org/drawingml/2006/main">
+            <a:pPr algn="l">
+              <a:buNone/>
+              <a:defRPr sz="1575" b="1">
+                <a:solidFill>
+                  <a:srgbClr val="263746"/>
+                </a:solidFill>
+              </a:defRPr>
+            </a:pPr>
+            <a:r>
+              <a:rPr sz="1575" b="1">
+                <a:solidFill>
+                  <a:srgbClr val="263746"/>
+                </a:solidFill>
+                <a:latin typeface="Microsoft YaHei"/>
+                <a:ea typeface="Microsoft YaHei"/>
+                <a:cs typeface="Microsoft YaHei"/>
+              </a:rPr>
+              <a:t>哪项八要素仍为空？</a:t>
+            </a:r>
+          </a:p>
+        </p:txBody>
+      </p:sp>
+      <p:sp>
+        <p:nvSpPr>
+          <p:cNvPr id="11" name="p20-n2">
+            <a:extLst xmlns:a="http://schemas.openxmlformats.org/drawingml/2006/main">
+              <a:ext uri="{FF2B5EF4-FFF2-40B4-BE49-F238E27FC236}">
+                <a16:creationId xmlns:a16="http://schemas.microsoft.com/office/drawing/2014/main" id="{C32C02EA-66A7-437B-B7FF-934A270C22C3}"/>
+              </a:ext>
+            </a:extLst>
+          </p:cNvPr>
+          <p:cNvSpPr>
+            <a:spLocks xmlns:a="http://schemas.openxmlformats.org/drawingml/2006/main" noGrp="1"/>
+          </p:cNvSpPr>
+          <p:nvPr/>
+        </p:nvSpPr>
+        <p:spPr>
+          <a:xfrm xmlns:a="http://schemas.openxmlformats.org/drawingml/2006/main">
+            <a:off x="685800" y="3448050"/>
+            <a:ext cx="476250" cy="476250"/>
+          </a:xfrm>
+          <a:prstGeom xmlns:a="http://schemas.openxmlformats.org/drawingml/2006/main" prst="roundRect">
+            <a:avLst>
+              <a:gd name="adj" fmla="val 16000"/>
+            </a:avLst>
+          </a:prstGeom>
+          <a:solidFill xmlns:a="http://schemas.openxmlformats.org/drawingml/2006/main">
+            <a:srgbClr val="C8161E"/>
+          </a:solidFill>
+          <a:ln xmlns:a="http://schemas.openxmlformats.org/drawingml/2006/main" w="0">
+            <a:noFill/>
+            <a:prstDash val="solid"/>
+          </a:ln>
+        </p:spPr>
+        <p:txBody>
+          <a:bodyPr xmlns:a="http://schemas.openxmlformats.org/drawingml/2006/main" lIns="76200" tIns="38100" rIns="76200" bIns="38100" anchor="ctr"/>
+          <a:lstStyle xmlns:a="http://schemas.openxmlformats.org/drawingml/2006/main"/>
+          <a:p xmlns:a="http://schemas.openxmlformats.org/drawingml/2006/main">
+            <a:pPr algn="ctr">
+              <a:buNone/>
+              <a:defRPr sz="1350" b="1">
+                <a:solidFill>
+                  <a:srgbClr val="FFFFFF"/>
+                </a:solidFill>
+              </a:defRPr>
+            </a:pPr>
+            <a:r>
+              <a:rPr sz="1350" b="1">
+                <a:solidFill>
+                  <a:srgbClr val="FFFFFF"/>
+                </a:solidFill>
+                <a:latin typeface="Arial"/>
+                <a:ea typeface="Arial"/>
+                <a:cs typeface="Arial"/>
+              </a:rPr>
+              <a:t>3</a:t>
+            </a:r>
+          </a:p>
+        </p:txBody>
+      </p:sp>
+      <p:sp>
+        <p:nvSpPr>
+          <p:cNvPr id="12" name="p20-t2">
+            <a:extLst xmlns:a="http://schemas.openxmlformats.org/drawingml/2006/main">
+              <a:ext uri="{FF2B5EF4-FFF2-40B4-BE49-F238E27FC236}">
+                <a16:creationId xmlns:a16="http://schemas.microsoft.com/office/drawing/2014/main" id="{3E194687-D7B7-45F6-84EB-D548F3A7975B}"/>
+              </a:ext>
+            </a:extLst>
+          </p:cNvPr>
+          <p:cNvSpPr>
+            <a:spLocks xmlns:a="http://schemas.openxmlformats.org/drawingml/2006/main" noGrp="1"/>
+          </p:cNvSpPr>
+          <p:nvPr/>
+        </p:nvSpPr>
+        <p:spPr>
+          <a:xfrm xmlns:a="http://schemas.openxmlformats.org/drawingml/2006/main">
+            <a:off x="1333500" y="3448050"/>
+            <a:ext cx="4057650" cy="476250"/>
+          </a:xfrm>
+          <a:prstGeom xmlns:a="http://schemas.openxmlformats.org/drawingml/2006/main" prst="rect">
+            <a:avLst/>
+          </a:prstGeom>
+          <a:solidFill xmlns:a="http://schemas.openxmlformats.org/drawingml/2006/main">
+            <a:srgbClr val="F8E9EA"/>
+          </a:solidFill>
+          <a:ln xmlns:a="http://schemas.openxmlformats.org/drawingml/2006/main" w="0">
+            <a:noFill/>
+            <a:prstDash val="solid"/>
+          </a:ln>
+        </p:spPr>
+        <p:txBody>
+          <a:bodyPr xmlns:a="http://schemas.openxmlformats.org/drawingml/2006/main" lIns="76200" tIns="38100" rIns="76200" bIns="38100" anchor="ctr"/>
+          <a:lstStyle xmlns:a="http://schemas.openxmlformats.org/drawingml/2006/main"/>
+          <a:p xmlns:a="http://schemas.openxmlformats.org/drawingml/2006/main">
+            <a:pPr algn="l">
+              <a:buNone/>
+              <a:defRPr sz="1575" b="1">
+                <a:solidFill>
+                  <a:srgbClr val="263746"/>
+                </a:solidFill>
+              </a:defRPr>
+            </a:pPr>
+            <a:r>
+              <a:rPr sz="1575" b="1">
+                <a:solidFill>
+                  <a:srgbClr val="263746"/>
+                </a:solidFill>
+                <a:latin typeface="Microsoft YaHei"/>
+                <a:ea typeface="Microsoft YaHei"/>
+                <a:cs typeface="Microsoft YaHei"/>
+              </a:rPr>
+              <a:t>第 13 课先验证哪一步？</a:t>
+            </a:r>
+          </a:p>
+        </p:txBody>
+      </p:sp>
+      <p:sp>
+        <p:nvSpPr>
+          <p:cNvPr id="13" name="p20-arrow">
+            <a:extLst xmlns:a="http://schemas.openxmlformats.org/drawingml/2006/main">
+              <a:ext uri="{FF2B5EF4-FFF2-40B4-BE49-F238E27FC236}">
+                <a16:creationId xmlns:a16="http://schemas.microsoft.com/office/drawing/2014/main" id="{9AF1FFE2-5E5B-44B1-9EBF-1ECDAD0BC09B}"/>
+              </a:ext>
+            </a:extLst>
+          </p:cNvPr>
+          <p:cNvSpPr>
+            <a:spLocks xmlns:a="http://schemas.openxmlformats.org/drawingml/2006/main" noGrp="1"/>
+          </p:cNvSpPr>
+          <p:nvPr/>
+        </p:nvSpPr>
+        <p:spPr>
+          <a:xfrm xmlns:a="http://schemas.openxmlformats.org/drawingml/2006/main">
+            <a:off x="5695950" y="2571750"/>
+            <a:ext cx="781050" cy="685800"/>
+          </a:xfrm>
+          <a:prstGeom xmlns:a="http://schemas.openxmlformats.org/drawingml/2006/main" prst="rect">
+            <a:avLst/>
+          </a:prstGeom>
+          <a:noFill xmlns:a="http://schemas.openxmlformats.org/drawingml/2006/main"/>
+          <a:ln xmlns:a="http://schemas.openxmlformats.org/drawingml/2006/main" w="0">
+            <a:noFill/>
+            <a:prstDash val="solid"/>
+          </a:ln>
+        </p:spPr>
+        <p:txBody>
+          <a:bodyPr xmlns:a="http://schemas.openxmlformats.org/drawingml/2006/main" lIns="76200" tIns="38100" rIns="76200" bIns="38100" anchor="ctr"/>
+          <a:lstStyle xmlns:a="http://schemas.openxmlformats.org/drawingml/2006/main"/>
+          <a:p xmlns:a="http://schemas.openxmlformats.org/drawingml/2006/main">
+            <a:pPr algn="ctr">
+              <a:buNone/>
+              <a:defRPr sz="3000" b="1">
+                <a:solidFill>
+                  <a:srgbClr val="C8161E"/>
+                </a:solidFill>
+              </a:defRPr>
+            </a:pPr>
+            <a:r>
+              <a:rPr sz="3000" b="1">
+                <a:solidFill>
+                  <a:srgbClr val="C8161E"/>
+                </a:solidFill>
+                <a:latin typeface="Microsoft YaHei"/>
+                <a:ea typeface="Microsoft YaHei"/>
+                <a:cs typeface="Microsoft YaHei"/>
+              </a:rPr>
               <a:t>→</a:t>
             </a:r>
           </a:p>
@@ -13593,6 +14604,7 @@
           <a:lstStyle xmlns:a="http://schemas.openxmlformats.org/drawingml/2006/main"/>
           <a:p xmlns:a="http://schemas.openxmlformats.org/drawingml/2006/main">
             <a:pPr algn="ctr">
+              <a:buNone/>
               <a:defRPr sz="1950" b="1">
                 <a:solidFill>
                   <a:srgbClr val="C8161E"/>
@@ -13650,6 +14662,7 @@
           <a:lstStyle xmlns:a="http://schemas.openxmlformats.org/drawingml/2006/main"/>
           <a:p xmlns:a="http://schemas.openxmlformats.org/drawingml/2006/main">
             <a:pPr algn="ctr">
+              <a:buNone/>
               <a:defRPr sz="1350" b="1">
                 <a:solidFill>
                   <a:srgbClr val="FFFFFF"/>
@@ -13705,6 +14718,7 @@
           <a:lstStyle xmlns:a="http://schemas.openxmlformats.org/drawingml/2006/main"/>
           <a:p xmlns:a="http://schemas.openxmlformats.org/drawingml/2006/main">
             <a:pPr algn="l">
+              <a:buNone/>
               <a:defRPr sz="1350" b="1">
                 <a:solidFill>
                   <a:srgbClr val="263746"/>
@@ -13762,6 +14776,7 @@
           <a:lstStyle xmlns:a="http://schemas.openxmlformats.org/drawingml/2006/main"/>
           <a:p xmlns:a="http://schemas.openxmlformats.org/drawingml/2006/main">
             <a:pPr algn="ctr">
+              <a:buNone/>
               <a:defRPr sz="1350" b="1">
                 <a:solidFill>
                   <a:srgbClr val="FFFFFF"/>
@@ -13817,6 +14832,7 @@
           <a:lstStyle xmlns:a="http://schemas.openxmlformats.org/drawingml/2006/main"/>
           <a:p xmlns:a="http://schemas.openxmlformats.org/drawingml/2006/main">
             <a:pPr algn="l">
+              <a:buNone/>
               <a:defRPr sz="1350" b="1">
                 <a:solidFill>
                   <a:srgbClr val="263746"/>
@@ -13874,6 +14890,7 @@
           <a:lstStyle xmlns:a="http://schemas.openxmlformats.org/drawingml/2006/main"/>
           <a:p xmlns:a="http://schemas.openxmlformats.org/drawingml/2006/main">
             <a:pPr algn="ctr">
+              <a:buNone/>
               <a:defRPr sz="1350" b="1">
                 <a:solidFill>
                   <a:srgbClr val="FFFFFF"/>
@@ -13929,6 +14946,7 @@
           <a:lstStyle xmlns:a="http://schemas.openxmlformats.org/drawingml/2006/main"/>
           <a:p xmlns:a="http://schemas.openxmlformats.org/drawingml/2006/main">
             <a:pPr algn="l">
+              <a:buNone/>
               <a:defRPr sz="1350" b="1">
                 <a:solidFill>
                   <a:srgbClr val="263746"/>
@@ -13986,6 +15004,7 @@
           <a:lstStyle xmlns:a="http://schemas.openxmlformats.org/drawingml/2006/main"/>
           <a:p xmlns:a="http://schemas.openxmlformats.org/drawingml/2006/main">
             <a:pPr algn="ctr">
+              <a:buNone/>
               <a:defRPr sz="1350" b="1">
                 <a:solidFill>
                   <a:srgbClr val="FFFFFF"/>
@@ -14041,6 +15060,7 @@
           <a:lstStyle xmlns:a="http://schemas.openxmlformats.org/drawingml/2006/main"/>
           <a:p xmlns:a="http://schemas.openxmlformats.org/drawingml/2006/main">
             <a:pPr algn="l">
+              <a:buNone/>
               <a:defRPr sz="1350" b="1">
                 <a:solidFill>
                   <a:srgbClr val="263746"/>
@@ -14098,6 +15118,7 @@
           <a:lstStyle xmlns:a="http://schemas.openxmlformats.org/drawingml/2006/main"/>
           <a:p xmlns:a="http://schemas.openxmlformats.org/drawingml/2006/main">
             <a:pPr algn="ctr">
+              <a:buNone/>
               <a:defRPr sz="1350" b="1">
                 <a:solidFill>
                   <a:srgbClr val="FFFFFF"/>
@@ -14153,6 +15174,7 @@
           <a:lstStyle xmlns:a="http://schemas.openxmlformats.org/drawingml/2006/main"/>
           <a:p xmlns:a="http://schemas.openxmlformats.org/drawingml/2006/main">
             <a:pPr algn="l">
+              <a:buNone/>
               <a:defRPr sz="1350" b="1">
                 <a:solidFill>
                   <a:srgbClr val="263746"/>
@@ -14208,6 +15230,7 @@
           <a:lstStyle xmlns:a="http://schemas.openxmlformats.org/drawingml/2006/main"/>
           <a:p xmlns:a="http://schemas.openxmlformats.org/drawingml/2006/main">
             <a:pPr algn="ctr">
+              <a:buNone/>
               <a:defRPr sz="1425" b="1">
                 <a:solidFill>
                   <a:srgbClr val="C8161E"/>
@@ -14355,6 +15378,7 @@
           <a:lstStyle xmlns:a="http://schemas.openxmlformats.org/drawingml/2006/main"/>
           <a:p xmlns:a="http://schemas.openxmlformats.org/drawingml/2006/main">
             <a:pPr algn="ctr">
+              <a:buNone/>
               <a:defRPr sz="1875" b="1">
                 <a:solidFill>
                   <a:srgbClr val="C8161E"/>
@@ -14412,6 +15436,7 @@
           <a:lstStyle xmlns:a="http://schemas.openxmlformats.org/drawingml/2006/main"/>
           <a:p xmlns:a="http://schemas.openxmlformats.org/drawingml/2006/main">
             <a:pPr algn="ctr">
+              <a:buNone/>
               <a:defRPr sz="1350" b="1">
                 <a:solidFill>
                   <a:srgbClr val="FFFFFF"/>
@@ -14467,6 +15492,7 @@
           <a:lstStyle xmlns:a="http://schemas.openxmlformats.org/drawingml/2006/main"/>
           <a:p xmlns:a="http://schemas.openxmlformats.org/drawingml/2006/main">
             <a:pPr algn="l">
+              <a:buNone/>
               <a:defRPr sz="1275" b="1">
                 <a:solidFill>
                   <a:srgbClr val="263746"/>
@@ -14524,6 +15550,7 @@
           <a:lstStyle xmlns:a="http://schemas.openxmlformats.org/drawingml/2006/main"/>
           <a:p xmlns:a="http://schemas.openxmlformats.org/drawingml/2006/main">
             <a:pPr algn="ctr">
+              <a:buNone/>
               <a:defRPr sz="1350" b="1">
                 <a:solidFill>
                   <a:srgbClr val="FFFFFF"/>
@@ -14579,6 +15606,7 @@
           <a:lstStyle xmlns:a="http://schemas.openxmlformats.org/drawingml/2006/main"/>
           <a:p xmlns:a="http://schemas.openxmlformats.org/drawingml/2006/main">
             <a:pPr algn="l">
+              <a:buNone/>
               <a:defRPr sz="1275" b="1">
                 <a:solidFill>
                   <a:srgbClr val="263746"/>
@@ -14636,6 +15664,7 @@
           <a:lstStyle xmlns:a="http://schemas.openxmlformats.org/drawingml/2006/main"/>
           <a:p xmlns:a="http://schemas.openxmlformats.org/drawingml/2006/main">
             <a:pPr algn="ctr">
+              <a:buNone/>
               <a:defRPr sz="1350" b="1">
                 <a:solidFill>
                   <a:srgbClr val="FFFFFF"/>
@@ -14691,6 +15720,7 @@
           <a:lstStyle xmlns:a="http://schemas.openxmlformats.org/drawingml/2006/main"/>
           <a:p xmlns:a="http://schemas.openxmlformats.org/drawingml/2006/main">
             <a:pPr algn="l">
+              <a:buNone/>
               <a:defRPr sz="1275" b="1">
                 <a:solidFill>
                   <a:srgbClr val="263746"/>
@@ -14748,6 +15778,7 @@
           <a:lstStyle xmlns:a="http://schemas.openxmlformats.org/drawingml/2006/main"/>
           <a:p xmlns:a="http://schemas.openxmlformats.org/drawingml/2006/main">
             <a:pPr algn="ctr">
+              <a:buNone/>
               <a:defRPr sz="1350" b="1">
                 <a:solidFill>
                   <a:srgbClr val="FFFFFF"/>
@@ -14803,6 +15834,7 @@
           <a:lstStyle xmlns:a="http://schemas.openxmlformats.org/drawingml/2006/main"/>
           <a:p xmlns:a="http://schemas.openxmlformats.org/drawingml/2006/main">
             <a:pPr algn="l">
+              <a:buNone/>
               <a:defRPr sz="1275" b="1">
                 <a:solidFill>
                   <a:srgbClr val="263746"/>
@@ -14887,6 +15919,7 @@
           <a:lstStyle xmlns:a="http://schemas.openxmlformats.org/drawingml/2006/main"/>
           <a:p xmlns:a="http://schemas.openxmlformats.org/drawingml/2006/main">
             <a:pPr algn="ctr">
+              <a:buNone/>
               <a:defRPr sz="1875" b="1">
                 <a:solidFill>
                   <a:srgbClr val="18354E"/>
@@ -14944,6 +15977,7 @@
           <a:lstStyle xmlns:a="http://schemas.openxmlformats.org/drawingml/2006/main"/>
           <a:p xmlns:a="http://schemas.openxmlformats.org/drawingml/2006/main">
             <a:pPr algn="ctr">
+              <a:buNone/>
               <a:defRPr sz="1350" b="1">
                 <a:solidFill>
                   <a:srgbClr val="FFFFFF"/>
@@ -14999,6 +16033,7 @@
           <a:lstStyle xmlns:a="http://schemas.openxmlformats.org/drawingml/2006/main"/>
           <a:p xmlns:a="http://schemas.openxmlformats.org/drawingml/2006/main">
             <a:pPr algn="l">
+              <a:buNone/>
               <a:defRPr sz="1350" b="1">
                 <a:solidFill>
                   <a:srgbClr val="263746"/>
@@ -15056,6 +16091,7 @@
           <a:lstStyle xmlns:a="http://schemas.openxmlformats.org/drawingml/2006/main"/>
           <a:p xmlns:a="http://schemas.openxmlformats.org/drawingml/2006/main">
             <a:pPr algn="ctr">
+              <a:buNone/>
               <a:defRPr sz="1350" b="1">
                 <a:solidFill>
                   <a:srgbClr val="FFFFFF"/>
@@ -15111,6 +16147,7 @@
           <a:lstStyle xmlns:a="http://schemas.openxmlformats.org/drawingml/2006/main"/>
           <a:p xmlns:a="http://schemas.openxmlformats.org/drawingml/2006/main">
             <a:pPr algn="l">
+              <a:buNone/>
               <a:defRPr sz="1350" b="1">
                 <a:solidFill>
                   <a:srgbClr val="263746"/>
@@ -15168,6 +16205,7 @@
           <a:lstStyle xmlns:a="http://schemas.openxmlformats.org/drawingml/2006/main"/>
           <a:p xmlns:a="http://schemas.openxmlformats.org/drawingml/2006/main">
             <a:pPr algn="ctr">
+              <a:buNone/>
               <a:defRPr sz="1350" b="1">
                 <a:solidFill>
                   <a:srgbClr val="FFFFFF"/>
@@ -15223,6 +16261,7 @@
           <a:lstStyle xmlns:a="http://schemas.openxmlformats.org/drawingml/2006/main"/>
           <a:p xmlns:a="http://schemas.openxmlformats.org/drawingml/2006/main">
             <a:pPr algn="l">
+              <a:buNone/>
               <a:defRPr sz="1350" b="1">
                 <a:solidFill>
                   <a:srgbClr val="263746"/>
@@ -15280,6 +16319,7 @@
           <a:lstStyle xmlns:a="http://schemas.openxmlformats.org/drawingml/2006/main"/>
           <a:p xmlns:a="http://schemas.openxmlformats.org/drawingml/2006/main">
             <a:pPr algn="ctr">
+              <a:buNone/>
               <a:defRPr sz="1350" b="1">
                 <a:solidFill>
                   <a:srgbClr val="FFFFFF"/>
@@ -15335,6 +16375,7 @@
           <a:lstStyle xmlns:a="http://schemas.openxmlformats.org/drawingml/2006/main"/>
           <a:p xmlns:a="http://schemas.openxmlformats.org/drawingml/2006/main">
             <a:pPr algn="l">
+              <a:buNone/>
               <a:defRPr sz="1350" b="1">
                 <a:solidFill>
                   <a:srgbClr val="263746"/>
@@ -15390,6 +16431,7 @@
           <a:lstStyle xmlns:a="http://schemas.openxmlformats.org/drawingml/2006/main"/>
           <a:p xmlns:a="http://schemas.openxmlformats.org/drawingml/2006/main">
             <a:pPr algn="ctr">
+              <a:buNone/>
               <a:defRPr sz="1650" b="1">
                 <a:solidFill>
                   <a:srgbClr val="C8161E"/>
@@ -15541,6 +16583,7 @@
           <a:lstStyle xmlns:a="http://schemas.openxmlformats.org/drawingml/2006/main"/>
           <a:p xmlns:a="http://schemas.openxmlformats.org/drawingml/2006/main">
             <a:pPr algn="ctr">
+              <a:buNone/>
               <a:defRPr sz="2025" b="1">
                 <a:solidFill>
                   <a:srgbClr val="2F638A"/>
@@ -15561,6 +16604,7 @@
           </a:p>
           <a:p xmlns:a="http://schemas.openxmlformats.org/drawingml/2006/main">
             <a:pPr algn="ctr">
+              <a:buNone/>
               <a:defRPr sz="2025" b="1">
                 <a:solidFill>
                   <a:srgbClr val="2F638A"/>
@@ -15616,6 +16660,7 @@
           <a:lstStyle xmlns:a="http://schemas.openxmlformats.org/drawingml/2006/main"/>
           <a:p xmlns:a="http://schemas.openxmlformats.org/drawingml/2006/main">
             <a:pPr algn="ctr">
+              <a:buNone/>
               <a:defRPr sz="1425" b="1">
                 <a:solidFill>
                   <a:srgbClr val="263746"/>
@@ -15671,6 +16716,7 @@
           <a:lstStyle xmlns:a="http://schemas.openxmlformats.org/drawingml/2006/main"/>
           <a:p xmlns:a="http://schemas.openxmlformats.org/drawingml/2006/main">
             <a:pPr algn="ctr">
+              <a:buNone/>
               <a:defRPr sz="1425" b="1">
                 <a:solidFill>
                   <a:srgbClr val="263746"/>
@@ -15726,6 +16772,7 @@
           <a:lstStyle xmlns:a="http://schemas.openxmlformats.org/drawingml/2006/main"/>
           <a:p xmlns:a="http://schemas.openxmlformats.org/drawingml/2006/main">
             <a:pPr algn="ctr">
+              <a:buNone/>
               <a:defRPr sz="1425" b="1">
                 <a:solidFill>
                   <a:srgbClr val="263746"/>
@@ -15779,6 +16826,7 @@
           <a:lstStyle xmlns:a="http://schemas.openxmlformats.org/drawingml/2006/main"/>
           <a:p xmlns:a="http://schemas.openxmlformats.org/drawingml/2006/main">
             <a:pPr algn="ctr">
+              <a:buNone/>
               <a:defRPr sz="2700" b="1">
                 <a:solidFill>
                   <a:srgbClr val="C8161E"/>
@@ -15836,6 +16884,7 @@
           <a:lstStyle xmlns:a="http://schemas.openxmlformats.org/drawingml/2006/main"/>
           <a:p xmlns:a="http://schemas.openxmlformats.org/drawingml/2006/main">
             <a:pPr algn="ctr">
+              <a:buNone/>
               <a:defRPr sz="2025" b="1">
                 <a:solidFill>
                   <a:srgbClr val="28745A"/>
@@ -15856,6 +16905,7 @@
           </a:p>
           <a:p xmlns:a="http://schemas.openxmlformats.org/drawingml/2006/main">
             <a:pPr algn="ctr">
+              <a:buNone/>
               <a:defRPr sz="2025" b="1">
                 <a:solidFill>
                   <a:srgbClr val="28745A"/>
@@ -15911,6 +16961,7 @@
           <a:lstStyle xmlns:a="http://schemas.openxmlformats.org/drawingml/2006/main"/>
           <a:p xmlns:a="http://schemas.openxmlformats.org/drawingml/2006/main">
             <a:pPr algn="ctr">
+              <a:buNone/>
               <a:defRPr sz="1425" b="1">
                 <a:solidFill>
                   <a:srgbClr val="263746"/>
@@ -15966,6 +17017,7 @@
           <a:lstStyle xmlns:a="http://schemas.openxmlformats.org/drawingml/2006/main"/>
           <a:p xmlns:a="http://schemas.openxmlformats.org/drawingml/2006/main">
             <a:pPr algn="ctr">
+              <a:buNone/>
               <a:defRPr sz="1425" b="1">
                 <a:solidFill>
                   <a:srgbClr val="263746"/>
@@ -16021,6 +17073,7 @@
           <a:lstStyle xmlns:a="http://schemas.openxmlformats.org/drawingml/2006/main"/>
           <a:p xmlns:a="http://schemas.openxmlformats.org/drawingml/2006/main">
             <a:pPr algn="ctr">
+              <a:buNone/>
               <a:defRPr sz="1425" b="1">
                 <a:solidFill>
                   <a:srgbClr val="263746"/>
@@ -16076,6 +17129,7 @@
           <a:lstStyle xmlns:a="http://schemas.openxmlformats.org/drawingml/2006/main"/>
           <a:p xmlns:a="http://schemas.openxmlformats.org/drawingml/2006/main">
             <a:pPr algn="ctr">
+              <a:buNone/>
               <a:defRPr sz="1650" b="1">
                 <a:solidFill>
                   <a:srgbClr val="C8161E"/>
@@ -16096,6 +17150,7 @@
           </a:p>
           <a:p xmlns:a="http://schemas.openxmlformats.org/drawingml/2006/main">
             <a:pPr algn="ctr">
+              <a:buNone/>
               <a:defRPr sz="1650" b="1">
                 <a:solidFill>
                   <a:srgbClr val="C8161E"/>
@@ -16151,6 +17206,7 @@
           <a:lstStyle xmlns:a="http://schemas.openxmlformats.org/drawingml/2006/main"/>
           <a:p xmlns:a="http://schemas.openxmlformats.org/drawingml/2006/main">
             <a:pPr algn="ctr">
+              <a:buNone/>
               <a:defRPr sz="1650" b="1">
                 <a:solidFill>
                   <a:srgbClr val="C8161E"/>
@@ -16302,6 +17358,7 @@
           <a:lstStyle xmlns:a="http://schemas.openxmlformats.org/drawingml/2006/main"/>
           <a:p xmlns:a="http://schemas.openxmlformats.org/drawingml/2006/main">
             <a:pPr algn="ctr">
+              <a:buNone/>
               <a:defRPr sz="1350" b="1">
                 <a:solidFill>
                   <a:srgbClr val="FFFFFF"/>
@@ -16357,6 +17414,7 @@
           <a:lstStyle xmlns:a="http://schemas.openxmlformats.org/drawingml/2006/main"/>
           <a:p xmlns:a="http://schemas.openxmlformats.org/drawingml/2006/main">
             <a:pPr algn="ctr">
+              <a:buNone/>
               <a:defRPr sz="1500" b="1">
                 <a:solidFill>
                   <a:srgbClr val="28745A"/>
@@ -16414,6 +17472,7 @@
           <a:lstStyle xmlns:a="http://schemas.openxmlformats.org/drawingml/2006/main"/>
           <a:p xmlns:a="http://schemas.openxmlformats.org/drawingml/2006/main">
             <a:pPr algn="ctr">
+              <a:buNone/>
               <a:defRPr sz="1200" b="1">
                 <a:solidFill>
                   <a:srgbClr val="263746"/>
@@ -16502,6 +17561,7 @@
           <a:lstStyle xmlns:a="http://schemas.openxmlformats.org/drawingml/2006/main"/>
           <a:p xmlns:a="http://schemas.openxmlformats.org/drawingml/2006/main">
             <a:pPr algn="ctr">
+              <a:buNone/>
               <a:defRPr sz="1350" b="1">
                 <a:solidFill>
                   <a:srgbClr val="FFFFFF"/>
@@ -16557,6 +17617,7 @@
           <a:lstStyle xmlns:a="http://schemas.openxmlformats.org/drawingml/2006/main"/>
           <a:p xmlns:a="http://schemas.openxmlformats.org/drawingml/2006/main">
             <a:pPr algn="ctr">
+              <a:buNone/>
               <a:defRPr sz="1500" b="1">
                 <a:solidFill>
                   <a:srgbClr val="2F638A"/>
@@ -16614,6 +17675,7 @@
           <a:lstStyle xmlns:a="http://schemas.openxmlformats.org/drawingml/2006/main"/>
           <a:p xmlns:a="http://schemas.openxmlformats.org/drawingml/2006/main">
             <a:pPr algn="ctr">
+              <a:buNone/>
               <a:defRPr sz="1200" b="1">
                 <a:solidFill>
                   <a:srgbClr val="263746"/>
@@ -16702,6 +17764,7 @@
           <a:lstStyle xmlns:a="http://schemas.openxmlformats.org/drawingml/2006/main"/>
           <a:p xmlns:a="http://schemas.openxmlformats.org/drawingml/2006/main">
             <a:pPr algn="ctr">
+              <a:buNone/>
               <a:defRPr sz="1350" b="1">
                 <a:solidFill>
                   <a:srgbClr val="FFFFFF"/>
@@ -16757,6 +17820,7 @@
           <a:lstStyle xmlns:a="http://schemas.openxmlformats.org/drawingml/2006/main"/>
           <a:p xmlns:a="http://schemas.openxmlformats.org/drawingml/2006/main">
             <a:pPr algn="ctr">
+              <a:buNone/>
               <a:defRPr sz="1500" b="1">
                 <a:solidFill>
                   <a:srgbClr val="18354E"/>
@@ -16814,6 +17878,7 @@
           <a:lstStyle xmlns:a="http://schemas.openxmlformats.org/drawingml/2006/main"/>
           <a:p xmlns:a="http://schemas.openxmlformats.org/drawingml/2006/main">
             <a:pPr algn="ctr">
+              <a:buNone/>
               <a:defRPr sz="1200" b="1">
                 <a:solidFill>
                   <a:srgbClr val="263746"/>
@@ -16902,6 +17967,7 @@
           <a:lstStyle xmlns:a="http://schemas.openxmlformats.org/drawingml/2006/main"/>
           <a:p xmlns:a="http://schemas.openxmlformats.org/drawingml/2006/main">
             <a:pPr algn="ctr">
+              <a:buNone/>
               <a:defRPr sz="1350" b="1">
                 <a:solidFill>
                   <a:srgbClr val="FFFFFF"/>
@@ -16957,6 +18023,7 @@
           <a:lstStyle xmlns:a="http://schemas.openxmlformats.org/drawingml/2006/main"/>
           <a:p xmlns:a="http://schemas.openxmlformats.org/drawingml/2006/main">
             <a:pPr algn="ctr">
+              <a:buNone/>
               <a:defRPr sz="1500" b="1">
                 <a:solidFill>
                   <a:srgbClr val="A86C12"/>
@@ -17014,6 +18081,7 @@
           <a:lstStyle xmlns:a="http://schemas.openxmlformats.org/drawingml/2006/main"/>
           <a:p xmlns:a="http://schemas.openxmlformats.org/drawingml/2006/main">
             <a:pPr algn="ctr">
+              <a:buNone/>
               <a:defRPr sz="1200" b="1">
                 <a:solidFill>
                   <a:srgbClr val="263746"/>
@@ -17102,6 +18170,7 @@
           <a:lstStyle xmlns:a="http://schemas.openxmlformats.org/drawingml/2006/main"/>
           <a:p xmlns:a="http://schemas.openxmlformats.org/drawingml/2006/main">
             <a:pPr algn="ctr">
+              <a:buNone/>
               <a:defRPr sz="1350" b="1">
                 <a:solidFill>
                   <a:srgbClr val="FFFFFF"/>
@@ -17157,6 +18226,7 @@
           <a:lstStyle xmlns:a="http://schemas.openxmlformats.org/drawingml/2006/main"/>
           <a:p xmlns:a="http://schemas.openxmlformats.org/drawingml/2006/main">
             <a:pPr algn="ctr">
+              <a:buNone/>
               <a:defRPr sz="1500" b="1">
                 <a:solidFill>
                   <a:srgbClr val="C8161E"/>
@@ -17214,6 +18284,7 @@
           <a:lstStyle xmlns:a="http://schemas.openxmlformats.org/drawingml/2006/main"/>
           <a:p xmlns:a="http://schemas.openxmlformats.org/drawingml/2006/main">
             <a:pPr algn="ctr">
+              <a:buNone/>
               <a:defRPr sz="1200" b="1">
                 <a:solidFill>
                   <a:srgbClr val="263746"/>
@@ -17269,6 +18340,7 @@
           <a:lstStyle xmlns:a="http://schemas.openxmlformats.org/drawingml/2006/main"/>
           <a:p xmlns:a="http://schemas.openxmlformats.org/drawingml/2006/main">
             <a:pPr algn="ctr">
+              <a:buNone/>
               <a:defRPr sz="1725" b="1">
                 <a:solidFill>
                   <a:srgbClr val="C8161E"/>
@@ -17355,6 +18427,7 @@
           <a:lstStyle xmlns:a="http://schemas.openxmlformats.org/drawingml/2006/main"/>
           <a:p xmlns:a="http://schemas.openxmlformats.org/drawingml/2006/main">
             <a:pPr algn="ctr">
+              <a:buNone/>
               <a:defRPr sz="1650" b="1">
                 <a:solidFill>
                   <a:srgbClr val="C8161E"/>
@@ -17537,6 +18610,7 @@
           <a:lstStyle xmlns:a="http://schemas.openxmlformats.org/drawingml/2006/main"/>
           <a:p xmlns:a="http://schemas.openxmlformats.org/drawingml/2006/main">
             <a:pPr algn="ctr">
+              <a:buNone/>
               <a:defRPr sz="1275" b="1">
                 <a:solidFill>
                   <a:srgbClr val="FFFFFF"/>
@@ -17592,6 +18666,7 @@
           <a:lstStyle xmlns:a="http://schemas.openxmlformats.org/drawingml/2006/main"/>
           <a:p xmlns:a="http://schemas.openxmlformats.org/drawingml/2006/main">
             <a:pPr algn="ctr">
+              <a:buNone/>
               <a:defRPr sz="1200" b="1">
                 <a:solidFill>
                   <a:srgbClr val="263746"/>
@@ -17645,6 +18720,7 @@
           <a:lstStyle xmlns:a="http://schemas.openxmlformats.org/drawingml/2006/main"/>
           <a:p xmlns:a="http://schemas.openxmlformats.org/drawingml/2006/main">
             <a:pPr algn="ctr">
+              <a:buNone/>
               <a:defRPr sz="1425" b="1">
                 <a:solidFill>
                   <a:srgbClr val="667684"/>
@@ -17702,6 +18778,7 @@
           <a:lstStyle xmlns:a="http://schemas.openxmlformats.org/drawingml/2006/main"/>
           <a:p xmlns:a="http://schemas.openxmlformats.org/drawingml/2006/main">
             <a:pPr algn="ctr">
+              <a:buNone/>
               <a:defRPr sz="1275" b="1">
                 <a:solidFill>
                   <a:srgbClr val="FFFFFF"/>
@@ -17757,6 +18834,7 @@
           <a:lstStyle xmlns:a="http://schemas.openxmlformats.org/drawingml/2006/main"/>
           <a:p xmlns:a="http://schemas.openxmlformats.org/drawingml/2006/main">
             <a:pPr algn="ctr">
+              <a:buNone/>
               <a:defRPr sz="1200" b="1">
                 <a:solidFill>
                   <a:srgbClr val="263746"/>
@@ -17810,6 +18888,7 @@
           <a:lstStyle xmlns:a="http://schemas.openxmlformats.org/drawingml/2006/main"/>
           <a:p xmlns:a="http://schemas.openxmlformats.org/drawingml/2006/main">
             <a:pPr algn="ctr">
+              <a:buNone/>
               <a:defRPr sz="1425" b="1">
                 <a:solidFill>
                   <a:srgbClr val="667684"/>
@@ -17867,6 +18946,7 @@
           <a:lstStyle xmlns:a="http://schemas.openxmlformats.org/drawingml/2006/main"/>
           <a:p xmlns:a="http://schemas.openxmlformats.org/drawingml/2006/main">
             <a:pPr algn="ctr">
+              <a:buNone/>
               <a:defRPr sz="1275" b="1">
                 <a:solidFill>
                   <a:srgbClr val="FFFFFF"/>
@@ -17922,6 +19002,7 @@
           <a:lstStyle xmlns:a="http://schemas.openxmlformats.org/drawingml/2006/main"/>
           <a:p xmlns:a="http://schemas.openxmlformats.org/drawingml/2006/main">
             <a:pPr algn="ctr">
+              <a:buNone/>
               <a:defRPr sz="1200" b="1">
                 <a:solidFill>
                   <a:srgbClr val="263746"/>
@@ -17975,6 +19056,7 @@
           <a:lstStyle xmlns:a="http://schemas.openxmlformats.org/drawingml/2006/main"/>
           <a:p xmlns:a="http://schemas.openxmlformats.org/drawingml/2006/main">
             <a:pPr algn="ctr">
+              <a:buNone/>
               <a:defRPr sz="1425" b="1">
                 <a:solidFill>
                   <a:srgbClr val="667684"/>
@@ -18032,6 +19114,7 @@
           <a:lstStyle xmlns:a="http://schemas.openxmlformats.org/drawingml/2006/main"/>
           <a:p xmlns:a="http://schemas.openxmlformats.org/drawingml/2006/main">
             <a:pPr algn="ctr">
+              <a:buNone/>
               <a:defRPr sz="1275" b="1">
                 <a:solidFill>
                   <a:srgbClr val="FFFFFF"/>
@@ -18087,6 +19170,7 @@
           <a:lstStyle xmlns:a="http://schemas.openxmlformats.org/drawingml/2006/main"/>
           <a:p xmlns:a="http://schemas.openxmlformats.org/drawingml/2006/main">
             <a:pPr algn="ctr">
+              <a:buNone/>
               <a:defRPr sz="1200" b="1">
                 <a:solidFill>
                   <a:srgbClr val="263746"/>
@@ -18107,6 +19191,7 @@
           </a:p>
           <a:p xmlns:a="http://schemas.openxmlformats.org/drawingml/2006/main">
             <a:pPr algn="ctr">
+              <a:buNone/>
               <a:defRPr sz="1200" b="1">
                 <a:solidFill>
                   <a:srgbClr val="263746"/>
@@ -18160,6 +19245,7 @@
           <a:lstStyle xmlns:a="http://schemas.openxmlformats.org/drawingml/2006/main"/>
           <a:p xmlns:a="http://schemas.openxmlformats.org/drawingml/2006/main">
             <a:pPr algn="ctr">
+              <a:buNone/>
               <a:defRPr sz="1425" b="1">
                 <a:solidFill>
                   <a:srgbClr val="667684"/>
@@ -18217,6 +19303,7 @@
           <a:lstStyle xmlns:a="http://schemas.openxmlformats.org/drawingml/2006/main"/>
           <a:p xmlns:a="http://schemas.openxmlformats.org/drawingml/2006/main">
             <a:pPr algn="ctr">
+              <a:buNone/>
               <a:defRPr sz="1275" b="1">
                 <a:solidFill>
                   <a:srgbClr val="FFFFFF"/>
@@ -18272,6 +19359,7 @@
           <a:lstStyle xmlns:a="http://schemas.openxmlformats.org/drawingml/2006/main"/>
           <a:p xmlns:a="http://schemas.openxmlformats.org/drawingml/2006/main">
             <a:pPr algn="ctr">
+              <a:buNone/>
               <a:defRPr sz="1200" b="1">
                 <a:solidFill>
                   <a:srgbClr val="263746"/>
@@ -18292,6 +19380,7 @@
           </a:p>
           <a:p xmlns:a="http://schemas.openxmlformats.org/drawingml/2006/main">
             <a:pPr algn="ctr">
+              <a:buNone/>
               <a:defRPr sz="1200" b="1">
                 <a:solidFill>
                   <a:srgbClr val="263746"/>
@@ -18345,6 +19434,7 @@
           <a:lstStyle xmlns:a="http://schemas.openxmlformats.org/drawingml/2006/main"/>
           <a:p xmlns:a="http://schemas.openxmlformats.org/drawingml/2006/main">
             <a:pPr algn="ctr">
+              <a:buNone/>
               <a:defRPr sz="1425" b="1">
                 <a:solidFill>
                   <a:srgbClr val="667684"/>
@@ -18402,6 +19492,7 @@
           <a:lstStyle xmlns:a="http://schemas.openxmlformats.org/drawingml/2006/main"/>
           <a:p xmlns:a="http://schemas.openxmlformats.org/drawingml/2006/main">
             <a:pPr algn="ctr">
+              <a:buNone/>
               <a:defRPr sz="1275" b="1">
                 <a:solidFill>
                   <a:srgbClr val="FFFFFF"/>
@@ -18457,6 +19548,7 @@
           <a:lstStyle xmlns:a="http://schemas.openxmlformats.org/drawingml/2006/main"/>
           <a:p xmlns:a="http://schemas.openxmlformats.org/drawingml/2006/main">
             <a:pPr algn="ctr">
+              <a:buNone/>
               <a:defRPr sz="1200" b="1">
                 <a:solidFill>
                   <a:srgbClr val="C8161E"/>
@@ -18510,6 +19602,7 @@
           <a:lstStyle xmlns:a="http://schemas.openxmlformats.org/drawingml/2006/main"/>
           <a:p xmlns:a="http://schemas.openxmlformats.org/drawingml/2006/main">
             <a:pPr algn="ctr">
+              <a:buNone/>
               <a:defRPr sz="1425" b="1">
                 <a:solidFill>
                   <a:srgbClr val="667684"/>
@@ -18565,6 +19658,7 @@
           <a:lstStyle xmlns:a="http://schemas.openxmlformats.org/drawingml/2006/main"/>
           <a:p xmlns:a="http://schemas.openxmlformats.org/drawingml/2006/main">
             <a:pPr algn="ctr">
+              <a:buNone/>
               <a:defRPr sz="1650" b="1">
                 <a:solidFill>
                   <a:srgbClr val="28745A"/>
@@ -18585,6 +19679,7 @@
           </a:p>
           <a:p xmlns:a="http://schemas.openxmlformats.org/drawingml/2006/main">
             <a:pPr algn="ctr">
+              <a:buNone/>
               <a:defRPr sz="1650" b="1">
                 <a:solidFill>
                   <a:srgbClr val="28745A"/>
@@ -18640,6 +19735,7 @@
           <a:lstStyle xmlns:a="http://schemas.openxmlformats.org/drawingml/2006/main"/>
           <a:p xmlns:a="http://schemas.openxmlformats.org/drawingml/2006/main">
             <a:pPr algn="ctr">
+              <a:buNone/>
               <a:defRPr sz="1575" b="1">
                 <a:solidFill>
                   <a:srgbClr val="C8161E"/>
@@ -18660,6 +19756,7 @@
           </a:p>
           <a:p xmlns:a="http://schemas.openxmlformats.org/drawingml/2006/main">
             <a:pPr algn="ctr">
+              <a:buNone/>
               <a:defRPr sz="1575" b="1">
                 <a:solidFill>
                   <a:srgbClr val="C8161E"/>
@@ -18811,6 +19908,7 @@
           <a:lstStyle xmlns:a="http://schemas.openxmlformats.org/drawingml/2006/main"/>
           <a:p xmlns:a="http://schemas.openxmlformats.org/drawingml/2006/main">
             <a:pPr algn="ctr">
+              <a:buNone/>
               <a:defRPr sz="1350" b="1">
                 <a:solidFill>
                   <a:srgbClr val="FFFFFF"/>
@@ -18866,6 +19964,7 @@
           <a:lstStyle xmlns:a="http://schemas.openxmlformats.org/drawingml/2006/main"/>
           <a:p xmlns:a="http://schemas.openxmlformats.org/drawingml/2006/main">
             <a:pPr algn="ctr">
+              <a:buNone/>
               <a:defRPr sz="1575" b="1">
                 <a:solidFill>
                   <a:srgbClr val="263746"/>
@@ -18919,6 +20018,7 @@
           <a:lstStyle xmlns:a="http://schemas.openxmlformats.org/drawingml/2006/main"/>
           <a:p xmlns:a="http://schemas.openxmlformats.org/drawingml/2006/main">
             <a:pPr algn="ctr">
+              <a:buNone/>
               <a:defRPr sz="1275" b="1">
                 <a:solidFill>
                   <a:srgbClr val="667684"/>
@@ -19007,6 +20107,7 @@
           <a:lstStyle xmlns:a="http://schemas.openxmlformats.org/drawingml/2006/main"/>
           <a:p xmlns:a="http://schemas.openxmlformats.org/drawingml/2006/main">
             <a:pPr algn="ctr">
+              <a:buNone/>
               <a:defRPr sz="1350" b="1">
                 <a:solidFill>
                   <a:srgbClr val="FFFFFF"/>
@@ -19062,6 +20163,7 @@
           <a:lstStyle xmlns:a="http://schemas.openxmlformats.org/drawingml/2006/main"/>
           <a:p xmlns:a="http://schemas.openxmlformats.org/drawingml/2006/main">
             <a:pPr algn="ctr">
+              <a:buNone/>
               <a:defRPr sz="1575" b="1">
                 <a:solidFill>
                   <a:srgbClr val="263746"/>
@@ -19115,6 +20217,7 @@
           <a:lstStyle xmlns:a="http://schemas.openxmlformats.org/drawingml/2006/main"/>
           <a:p xmlns:a="http://schemas.openxmlformats.org/drawingml/2006/main">
             <a:pPr algn="ctr">
+              <a:buNone/>
               <a:defRPr sz="1275" b="1">
                 <a:solidFill>
                   <a:srgbClr val="667684"/>
@@ -19203,6 +20306,7 @@
           <a:lstStyle xmlns:a="http://schemas.openxmlformats.org/drawingml/2006/main"/>
           <a:p xmlns:a="http://schemas.openxmlformats.org/drawingml/2006/main">
             <a:pPr algn="ctr">
+              <a:buNone/>
               <a:defRPr sz="1350" b="1">
                 <a:solidFill>
                   <a:srgbClr val="FFFFFF"/>
@@ -19258,6 +20362,7 @@
           <a:lstStyle xmlns:a="http://schemas.openxmlformats.org/drawingml/2006/main"/>
           <a:p xmlns:a="http://schemas.openxmlformats.org/drawingml/2006/main">
             <a:pPr algn="ctr">
+              <a:buNone/>
               <a:defRPr sz="1575" b="1">
                 <a:solidFill>
                   <a:srgbClr val="263746"/>
@@ -19311,6 +20416,7 @@
           <a:lstStyle xmlns:a="http://schemas.openxmlformats.org/drawingml/2006/main"/>
           <a:p xmlns:a="http://schemas.openxmlformats.org/drawingml/2006/main">
             <a:pPr algn="ctr">
+              <a:buNone/>
               <a:defRPr sz="1275" b="1">
                 <a:solidFill>
                   <a:srgbClr val="667684"/>
@@ -19399,6 +20505,7 @@
           <a:lstStyle xmlns:a="http://schemas.openxmlformats.org/drawingml/2006/main"/>
           <a:p xmlns:a="http://schemas.openxmlformats.org/drawingml/2006/main">
             <a:pPr algn="ctr">
+              <a:buNone/>
               <a:defRPr sz="1350" b="1">
                 <a:solidFill>
                   <a:srgbClr val="FFFFFF"/>
@@ -19454,6 +20561,7 @@
           <a:lstStyle xmlns:a="http://schemas.openxmlformats.org/drawingml/2006/main"/>
           <a:p xmlns:a="http://schemas.openxmlformats.org/drawingml/2006/main">
             <a:pPr algn="ctr">
+              <a:buNone/>
               <a:defRPr sz="1575" b="1">
                 <a:solidFill>
                   <a:srgbClr val="263746"/>
@@ -19507,6 +20615,7 @@
           <a:lstStyle xmlns:a="http://schemas.openxmlformats.org/drawingml/2006/main"/>
           <a:p xmlns:a="http://schemas.openxmlformats.org/drawingml/2006/main">
             <a:pPr algn="ctr">
+              <a:buNone/>
               <a:defRPr sz="1275" b="1">
                 <a:solidFill>
                   <a:srgbClr val="667684"/>
@@ -19595,6 +20704,7 @@
           <a:lstStyle xmlns:a="http://schemas.openxmlformats.org/drawingml/2006/main"/>
           <a:p xmlns:a="http://schemas.openxmlformats.org/drawingml/2006/main">
             <a:pPr algn="ctr">
+              <a:buNone/>
               <a:defRPr sz="1350" b="1">
                 <a:solidFill>
                   <a:srgbClr val="FFFFFF"/>
@@ -19650,6 +20760,7 @@
           <a:lstStyle xmlns:a="http://schemas.openxmlformats.org/drawingml/2006/main"/>
           <a:p xmlns:a="http://schemas.openxmlformats.org/drawingml/2006/main">
             <a:pPr algn="ctr">
+              <a:buNone/>
               <a:defRPr sz="1575" b="1">
                 <a:solidFill>
                   <a:srgbClr val="C8161E"/>
@@ -19703,6 +20814,7 @@
           <a:lstStyle xmlns:a="http://schemas.openxmlformats.org/drawingml/2006/main"/>
           <a:p xmlns:a="http://schemas.openxmlformats.org/drawingml/2006/main">
             <a:pPr algn="ctr">
+              <a:buNone/>
               <a:defRPr sz="1275" b="1">
                 <a:solidFill>
                   <a:srgbClr val="667684"/>
@@ -20116,6 +21228,7 @@
           <a:lstStyle xmlns:a="http://schemas.openxmlformats.org/drawingml/2006/main"/>
           <a:p xmlns:a="http://schemas.openxmlformats.org/drawingml/2006/main">
             <a:pPr algn="ctr">
+              <a:buNone/>
               <a:defRPr sz="2550" b="1">
                 <a:solidFill>
                   <a:srgbClr val="C8161E"/>
@@ -20254,6 +21367,7 @@
           <a:lstStyle xmlns:a="http://schemas.openxmlformats.org/drawingml/2006/main"/>
           <a:p xmlns:a="http://schemas.openxmlformats.org/drawingml/2006/main">
             <a:pPr algn="ctr">
+              <a:buNone/>
               <a:defRPr sz="2550" b="1">
                 <a:solidFill>
                   <a:srgbClr val="C8161E"/>
@@ -20392,6 +21506,7 @@
           <a:lstStyle xmlns:a="http://schemas.openxmlformats.org/drawingml/2006/main"/>
           <a:p xmlns:a="http://schemas.openxmlformats.org/drawingml/2006/main">
             <a:pPr algn="ctr">
+              <a:buNone/>
               <a:defRPr sz="2550" b="1">
                 <a:solidFill>
                   <a:srgbClr val="C8161E"/>
@@ -20563,6 +21678,7 @@
           <a:lstStyle xmlns:a="http://schemas.openxmlformats.org/drawingml/2006/main"/>
           <a:p xmlns:a="http://schemas.openxmlformats.org/drawingml/2006/main">
             <a:pPr algn="ctr">
+              <a:buNone/>
               <a:defRPr sz="1650" b="1">
                 <a:solidFill>
                   <a:srgbClr val="C8161E"/>
@@ -20583,6 +21699,7 @@
           </a:p>
           <a:p xmlns:a="http://schemas.openxmlformats.org/drawingml/2006/main">
             <a:pPr algn="ctr">
+              <a:buNone/>
               <a:defRPr sz="1650" b="1">
                 <a:solidFill>
                   <a:srgbClr val="C8161E"/>
@@ -20638,6 +21755,7 @@
           <a:lstStyle xmlns:a="http://schemas.openxmlformats.org/drawingml/2006/main"/>
           <a:p xmlns:a="http://schemas.openxmlformats.org/drawingml/2006/main">
             <a:pPr algn="ctr">
+              <a:buNone/>
               <a:defRPr sz="1650" b="1">
                 <a:solidFill>
                   <a:srgbClr val="C8161E"/>
@@ -20789,6 +21907,7 @@
           <a:lstStyle xmlns:a="http://schemas.openxmlformats.org/drawingml/2006/main"/>
           <a:p xmlns:a="http://schemas.openxmlformats.org/drawingml/2006/main">
             <a:pPr algn="ctr">
+              <a:buNone/>
               <a:defRPr sz="1350" b="1">
                 <a:solidFill>
                   <a:srgbClr val="FFFFFF"/>
@@ -20844,6 +21963,7 @@
           <a:lstStyle xmlns:a="http://schemas.openxmlformats.org/drawingml/2006/main"/>
           <a:p xmlns:a="http://schemas.openxmlformats.org/drawingml/2006/main">
             <a:pPr algn="l">
+              <a:buNone/>
               <a:defRPr sz="1725" b="1">
                 <a:solidFill>
                   <a:srgbClr val="263746"/>
@@ -20899,6 +22019,7 @@
           <a:lstStyle xmlns:a="http://schemas.openxmlformats.org/drawingml/2006/main"/>
           <a:p xmlns:a="http://schemas.openxmlformats.org/drawingml/2006/main">
             <a:pPr algn="ctr">
+              <a:buNone/>
               <a:defRPr sz="1650" b="1">
                 <a:solidFill>
                   <a:srgbClr val="28745A"/>
@@ -20956,6 +22077,7 @@
           <a:lstStyle xmlns:a="http://schemas.openxmlformats.org/drawingml/2006/main"/>
           <a:p xmlns:a="http://schemas.openxmlformats.org/drawingml/2006/main">
             <a:pPr algn="ctr">
+              <a:buNone/>
               <a:defRPr sz="1350" b="1">
                 <a:solidFill>
                   <a:srgbClr val="FFFFFF"/>
@@ -21011,6 +22133,7 @@
           <a:lstStyle xmlns:a="http://schemas.openxmlformats.org/drawingml/2006/main"/>
           <a:p xmlns:a="http://schemas.openxmlformats.org/drawingml/2006/main">
             <a:pPr algn="l">
+              <a:buNone/>
               <a:defRPr sz="1725" b="1">
                 <a:solidFill>
                   <a:srgbClr val="263746"/>
@@ -21066,6 +22189,7 @@
           <a:lstStyle xmlns:a="http://schemas.openxmlformats.org/drawingml/2006/main"/>
           <a:p xmlns:a="http://schemas.openxmlformats.org/drawingml/2006/main">
             <a:pPr algn="ctr">
+              <a:buNone/>
               <a:defRPr sz="1650" b="1">
                 <a:solidFill>
                   <a:srgbClr val="28745A"/>
@@ -21123,6 +22247,7 @@
           <a:lstStyle xmlns:a="http://schemas.openxmlformats.org/drawingml/2006/main"/>
           <a:p xmlns:a="http://schemas.openxmlformats.org/drawingml/2006/main">
             <a:pPr algn="ctr">
+              <a:buNone/>
               <a:defRPr sz="1350" b="1">
                 <a:solidFill>
                   <a:srgbClr val="FFFFFF"/>
@@ -21178,6 +22303,7 @@
           <a:lstStyle xmlns:a="http://schemas.openxmlformats.org/drawingml/2006/main"/>
           <a:p xmlns:a="http://schemas.openxmlformats.org/drawingml/2006/main">
             <a:pPr algn="l">
+              <a:buNone/>
               <a:defRPr sz="1725" b="1">
                 <a:solidFill>
                   <a:srgbClr val="263746"/>
@@ -21233,6 +22359,7 @@
           <a:lstStyle xmlns:a="http://schemas.openxmlformats.org/drawingml/2006/main"/>
           <a:p xmlns:a="http://schemas.openxmlformats.org/drawingml/2006/main">
             <a:pPr algn="ctr">
+              <a:buNone/>
               <a:defRPr sz="1650" b="1">
                 <a:solidFill>
                   <a:srgbClr val="28745A"/>
@@ -21290,6 +22417,7 @@
           <a:lstStyle xmlns:a="http://schemas.openxmlformats.org/drawingml/2006/main"/>
           <a:p xmlns:a="http://schemas.openxmlformats.org/drawingml/2006/main">
             <a:pPr algn="ctr">
+              <a:buNone/>
               <a:defRPr sz="1350" b="1">
                 <a:solidFill>
                   <a:srgbClr val="FFFFFF"/>
@@ -21345,6 +22473,7 @@
           <a:lstStyle xmlns:a="http://schemas.openxmlformats.org/drawingml/2006/main"/>
           <a:p xmlns:a="http://schemas.openxmlformats.org/drawingml/2006/main">
             <a:pPr algn="l">
+              <a:buNone/>
               <a:defRPr sz="1725" b="1">
                 <a:solidFill>
                   <a:srgbClr val="263746"/>
@@ -21400,6 +22529,7 @@
           <a:lstStyle xmlns:a="http://schemas.openxmlformats.org/drawingml/2006/main"/>
           <a:p xmlns:a="http://schemas.openxmlformats.org/drawingml/2006/main">
             <a:pPr algn="ctr">
+              <a:buNone/>
               <a:defRPr sz="1650" b="1">
                 <a:solidFill>
                   <a:srgbClr val="C8161E"/>
@@ -21455,6 +22585,7 @@
           <a:lstStyle xmlns:a="http://schemas.openxmlformats.org/drawingml/2006/main"/>
           <a:p xmlns:a="http://schemas.openxmlformats.org/drawingml/2006/main">
             <a:pPr algn="ctr">
+              <a:buNone/>
               <a:defRPr sz="1650" b="1">
                 <a:solidFill>
                   <a:srgbClr val="C8161E"/>
